--- a/Deutsch_7A/Balladen/Woche2/Donnerstag_05-11_Deutsch_7A.pptx
+++ b/Deutsch_7A/Balladen/Woche2/Donnerstag_05-11_Deutsch_7A.pptx
@@ -606,7 +606,7 @@
           <a:p>
             <a:r>
               <a:rPr lang="en-US" dirty="0"/>
-              <a:t>Lösungen auf den folgenden Aufdeck-Folien. Jeder Text passt zu einer Sportart der Klasse (Gewichtheben, Judo, Handball). Wer fertig ist: * bei Nr. 1 den Kehrreim bestimmen.</a:t>
+              <a:t>Drei Fassungen des Schnipsels: Gewichtheben, Judo, Handball – jeder bekommt seine Sportart. Aufbau überall gleich: 1 Paddy Str. 4, 2 Kreuzreim, 3 umarmender Reim, 4 Paarreim. Lösungen auf den Aufdeck-Folien (je Nummer alle drei Sportarten). Wer fertig ist: * bei Nr. 1 den Kehrreim bestimmen.</a:t>
             </a:r>
             <a:endParaRPr lang="en-US" dirty="0"/>
           </a:p>
@@ -782,7 +782,7 @@
           <a:p>
             <a:r>
               <a:rPr lang="en-US" dirty="0"/>
-              <a:t>Erst einen Schüler die Buchstaben und die Reimart nennen lassen, dann diese Folie zeigen. Alle verbessern mit Grün.</a:t>
+              <a:t>Je einen Schüler aus jeder Sportart Buchstaben und Reimart nennen lassen, dann zeigen. Alle verbessern mit Grün. Gemeinsam festhalten: Nr. 2 ist in allen drei Fassungen ein Kreuzreim (abab).</a:t>
             </a:r>
             <a:endParaRPr lang="en-US" dirty="0"/>
           </a:p>
@@ -870,7 +870,7 @@
           <a:p>
             <a:r>
               <a:rPr lang="en-US" dirty="0"/>
-              <a:t>Erst einen Schüler die Buchstaben und die Reimart nennen lassen, dann diese Folie zeigen. Alle verbessern mit Grün.</a:t>
+              <a:t>Je einen Schüler aus jeder Sportart Buchstaben und Reimart nennen lassen, dann zeigen. Alle verbessern mit Grün. Gemeinsam festhalten: Nr. 3 ist in allen drei Fassungen ein umarmender Reim (abba). Typische Hürde: Vers 1 und 4 vergleichen.</a:t>
             </a:r>
             <a:endParaRPr lang="en-US" dirty="0"/>
           </a:p>
@@ -958,7 +958,7 @@
           <a:p>
             <a:r>
               <a:rPr lang="en-US" dirty="0"/>
-              <a:t>Erst einen Schüler die Buchstaben und die Reimart nennen lassen, dann diese Folie zeigen. Alle verbessern mit Grün.</a:t>
+              <a:t>Je einen Schüler aus jeder Sportart Buchstaben und Reimart nennen lassen, dann zeigen. Alle verbessern mit Grün. Gemeinsam festhalten: Nr. 4 ist in allen drei Fassungen ein Paarreim (aabb).</a:t>
             </a:r>
             <a:endParaRPr lang="en-US" dirty="0"/>
           </a:p>
@@ -3029,7 +3029,7 @@
                 <a:ea typeface="Calibri" pitchFamily="34" charset="-122"/>
                 <a:cs typeface="Calibri" pitchFamily="34" charset="-120"/>
               </a:rPr>
-              <a:t>6 Minuten · allein · 1 Paddy Fingal · 2 Beim Heben · 3 Auf der Matte · 4 Im Siebenmeterkreis      </a:t>
+              <a:t>6 Minuten · allein · Nr. 1 Paddy Fingal, Nr. 2–4 aus deiner Sportart      </a:t>
             </a:r>
             <a:pPr indent="0" marL="0">
               <a:buNone/>
@@ -4026,7 +4026,7 @@
                 <a:ea typeface="Cambria" pitchFamily="34" charset="-122"/>
                 <a:cs typeface="Cambria" pitchFamily="34" charset="-120"/>
               </a:rPr>
-              <a:t>Ü3  Lösung – 2  Beim Heben</a:t>
+              <a:t>Ü3  Lösung – Nr. 2: Kreuzreim (abab)</a:t>
             </a:r>
             <a:endParaRPr lang="en-US" sz="3200" dirty="0"/>
           </a:p>
@@ -4118,12 +4118,73 @@
         </p:nvSpPr>
         <p:spPr>
           <a:xfrm>
-            <a:off x="548640" y="1554480"/>
-            <a:ext cx="8778240" cy="548640"/>
+            <a:off x="548640" y="1417320"/>
+            <a:ext cx="3611880" cy="411480"/>
           </a:xfrm>
           <a:prstGeom prst="roundRect">
             <a:avLst>
-              <a:gd name="adj" fmla="val 13333"/>
+              <a:gd name="adj" fmla="val 11111"/>
+            </a:avLst>
+          </a:prstGeom>
+          <a:solidFill>
+            <a:srgbClr val="1E2761"/>
+          </a:solidFill>
+          <a:ln/>
+        </p:spPr>
+      </p:sp>
+      <p:sp>
+        <p:nvSpPr>
+          <p:cNvPr id="8" name="Text 5"/>
+          <p:cNvSpPr txBox="1"/>
+          <p:nvPr/>
+        </p:nvSpPr>
+        <p:spPr>
+          <a:xfrm>
+            <a:off x="548640" y="1417320"/>
+            <a:ext cx="3611880" cy="411480"/>
+          </a:xfrm>
+          <a:prstGeom prst="rect">
+            <a:avLst/>
+          </a:prstGeom>
+          <a:noFill/>
+          <a:ln/>
+        </p:spPr>
+        <p:txBody>
+          <a:bodyPr wrap="square" lIns="0" tIns="0" rIns="0" bIns="0" rtlCol="0" anchor="ctr"/>
+          <a:lstStyle/>
+          <a:p>
+            <a:pPr algn="ctr" indent="0" marL="0">
+              <a:buNone/>
+            </a:pPr>
+            <a:r>
+              <a:rPr lang="en-US" sz="1500" b="1" dirty="0">
+                <a:solidFill>
+                  <a:srgbClr val="FFFFFF"/>
+                </a:solidFill>
+                <a:latin typeface="Calibri" pitchFamily="34" charset="0"/>
+                <a:ea typeface="Calibri" pitchFamily="34" charset="-122"/>
+                <a:cs typeface="Calibri" pitchFamily="34" charset="-120"/>
+              </a:rPr>
+              <a:t>Gewichtheben</a:t>
+            </a:r>
+            <a:endParaRPr lang="en-US" sz="1500" dirty="0"/>
+          </a:p>
+        </p:txBody>
+      </p:sp>
+      <p:sp>
+        <p:nvSpPr>
+          <p:cNvPr id="9" name="Shape 6"/>
+          <p:cNvSpPr/>
+          <p:nvPr/>
+        </p:nvSpPr>
+        <p:spPr>
+          <a:xfrm>
+            <a:off x="548640" y="1965960"/>
+            <a:ext cx="3611880" cy="621792"/>
+          </a:xfrm>
+          <a:prstGeom prst="roundRect">
+            <a:avLst>
+              <a:gd name="adj" fmla="val 7353"/>
             </a:avLst>
           </a:prstGeom>
           <a:solidFill>
@@ -4134,30 +4195,30 @@
       </p:sp>
       <p:sp>
         <p:nvSpPr>
-          <p:cNvPr id="8" name="Text 5"/>
-          <p:cNvSpPr txBox="1"/>
-          <p:nvPr/>
-        </p:nvSpPr>
-        <p:spPr>
-          <a:xfrm>
-            <a:off x="822960" y="1645920"/>
-            <a:ext cx="8412480" cy="411480"/>
-          </a:xfrm>
-          <a:prstGeom prst="rect">
-            <a:avLst/>
-          </a:prstGeom>
-          <a:noFill/>
-          <a:ln/>
-        </p:spPr>
-        <p:txBody>
-          <a:bodyPr wrap="square" lIns="0" tIns="0" rIns="0" bIns="0" rtlCol="0" anchor="t"/>
-          <a:lstStyle/>
-          <a:p>
-            <a:pPr indent="0" marL="0">
-              <a:buNone/>
-            </a:pPr>
-            <a:r>
-              <a:rPr lang="en-US" sz="2200" dirty="0">
+          <p:cNvPr id="10" name="Text 7"/>
+          <p:cNvSpPr txBox="1"/>
+          <p:nvPr/>
+        </p:nvSpPr>
+        <p:spPr>
+          <a:xfrm>
+            <a:off x="640080" y="2039112"/>
+            <a:ext cx="2971800" cy="502920"/>
+          </a:xfrm>
+          <a:prstGeom prst="rect">
+            <a:avLst/>
+          </a:prstGeom>
+          <a:noFill/>
+          <a:ln/>
+        </p:spPr>
+        <p:txBody>
+          <a:bodyPr wrap="square" lIns="0" tIns="0" rIns="0" bIns="0" rtlCol="0" anchor="ctr"/>
+          <a:lstStyle/>
+          <a:p>
+            <a:pPr indent="0" marL="0">
+              <a:buNone/>
+            </a:pPr>
+            <a:r>
+              <a:rPr lang="en-US" sz="1250" dirty="0">
                 <a:solidFill>
                   <a:srgbClr val="1E2761"/>
                 </a:solidFill>
@@ -4167,20 +4228,20 @@
               </a:rPr>
               <a:t>Die Halle ist noch kalt und leer,</a:t>
             </a:r>
-            <a:endParaRPr lang="en-US" sz="2200" dirty="0"/>
-          </a:p>
-        </p:txBody>
-      </p:sp>
-      <p:sp>
-        <p:nvSpPr>
-          <p:cNvPr id="9" name="Shape 6"/>
+            <a:endParaRPr lang="en-US" sz="1250" dirty="0"/>
+          </a:p>
+        </p:txBody>
+      </p:sp>
+      <p:sp>
+        <p:nvSpPr>
+          <p:cNvPr id="11" name="Shape 8"/>
           <p:cNvSpPr/>
           <p:nvPr/>
         </p:nvSpPr>
         <p:spPr>
           <a:xfrm>
-            <a:off x="9555480" y="1600200"/>
-            <a:ext cx="822960" cy="457200"/>
+            <a:off x="3675888" y="2093976"/>
+            <a:ext cx="411480" cy="365760"/>
           </a:xfrm>
           <a:prstGeom prst="roundRect">
             <a:avLst>
@@ -4195,14 +4256,14 @@
       </p:sp>
       <p:sp>
         <p:nvSpPr>
-          <p:cNvPr id="10" name="Text 7"/>
-          <p:cNvSpPr txBox="1"/>
-          <p:nvPr/>
-        </p:nvSpPr>
-        <p:spPr>
-          <a:xfrm>
-            <a:off x="9555480" y="1600200"/>
-            <a:ext cx="822960" cy="457200"/>
+          <p:cNvPr id="12" name="Text 9"/>
+          <p:cNvSpPr txBox="1"/>
+          <p:nvPr/>
+        </p:nvSpPr>
+        <p:spPr>
+          <a:xfrm>
+            <a:off x="3675888" y="2093976"/>
+            <a:ext cx="411480" cy="365760"/>
           </a:xfrm>
           <a:prstGeom prst="rect">
             <a:avLst/>
@@ -4218,7 +4279,7 @@
               <a:buNone/>
             </a:pPr>
             <a:r>
-              <a:rPr lang="en-US" sz="2200" b="1" dirty="0">
+              <a:rPr lang="en-US" sz="1600" b="1" dirty="0">
                 <a:solidFill>
                   <a:srgbClr val="FFFFFF"/>
                 </a:solidFill>
@@ -4228,24 +4289,24 @@
               </a:rPr>
               <a:t>a</a:t>
             </a:r>
-            <a:endParaRPr lang="en-US" sz="2200" dirty="0"/>
-          </a:p>
-        </p:txBody>
-      </p:sp>
-      <p:sp>
-        <p:nvSpPr>
-          <p:cNvPr id="11" name="Shape 8"/>
+            <a:endParaRPr lang="en-US" sz="1600" dirty="0"/>
+          </a:p>
+        </p:txBody>
+      </p:sp>
+      <p:sp>
+        <p:nvSpPr>
+          <p:cNvPr id="13" name="Shape 10"/>
           <p:cNvSpPr/>
           <p:nvPr/>
         </p:nvSpPr>
         <p:spPr>
           <a:xfrm>
-            <a:off x="548640" y="2212848"/>
-            <a:ext cx="8778240" cy="548640"/>
+            <a:off x="548640" y="2679192"/>
+            <a:ext cx="3611880" cy="621792"/>
           </a:xfrm>
           <a:prstGeom prst="roundRect">
             <a:avLst>
-              <a:gd name="adj" fmla="val 13333"/>
+              <a:gd name="adj" fmla="val 7353"/>
             </a:avLst>
           </a:prstGeom>
           <a:solidFill>
@@ -4256,30 +4317,30 @@
       </p:sp>
       <p:sp>
         <p:nvSpPr>
-          <p:cNvPr id="12" name="Text 9"/>
-          <p:cNvSpPr txBox="1"/>
-          <p:nvPr/>
-        </p:nvSpPr>
-        <p:spPr>
-          <a:xfrm>
-            <a:off x="822960" y="2304288"/>
-            <a:ext cx="8412480" cy="411480"/>
-          </a:xfrm>
-          <a:prstGeom prst="rect">
-            <a:avLst/>
-          </a:prstGeom>
-          <a:noFill/>
-          <a:ln/>
-        </p:spPr>
-        <p:txBody>
-          <a:bodyPr wrap="square" lIns="0" tIns="0" rIns="0" bIns="0" rtlCol="0" anchor="t"/>
-          <a:lstStyle/>
-          <a:p>
-            <a:pPr indent="0" marL="0">
-              <a:buNone/>
-            </a:pPr>
-            <a:r>
-              <a:rPr lang="en-US" sz="2200" dirty="0">
+          <p:cNvPr id="14" name="Text 11"/>
+          <p:cNvSpPr txBox="1"/>
+          <p:nvPr/>
+        </p:nvSpPr>
+        <p:spPr>
+          <a:xfrm>
+            <a:off x="640080" y="2752344"/>
+            <a:ext cx="2971800" cy="502920"/>
+          </a:xfrm>
+          <a:prstGeom prst="rect">
+            <a:avLst/>
+          </a:prstGeom>
+          <a:noFill/>
+          <a:ln/>
+        </p:spPr>
+        <p:txBody>
+          <a:bodyPr wrap="square" lIns="0" tIns="0" rIns="0" bIns="0" rtlCol="0" anchor="ctr"/>
+          <a:lstStyle/>
+          <a:p>
+            <a:pPr indent="0" marL="0">
+              <a:buNone/>
+            </a:pPr>
+            <a:r>
+              <a:rPr lang="en-US" sz="1250" dirty="0">
                 <a:solidFill>
                   <a:srgbClr val="1E2761"/>
                 </a:solidFill>
@@ -4289,20 +4350,20 @@
               </a:rPr>
               <a:t>die Hantel liegt schon da.</a:t>
             </a:r>
-            <a:endParaRPr lang="en-US" sz="2200" dirty="0"/>
-          </a:p>
-        </p:txBody>
-      </p:sp>
-      <p:sp>
-        <p:nvSpPr>
-          <p:cNvPr id="13" name="Shape 10"/>
+            <a:endParaRPr lang="en-US" sz="1250" dirty="0"/>
+          </a:p>
+        </p:txBody>
+      </p:sp>
+      <p:sp>
+        <p:nvSpPr>
+          <p:cNvPr id="15" name="Shape 12"/>
           <p:cNvSpPr/>
           <p:nvPr/>
         </p:nvSpPr>
         <p:spPr>
           <a:xfrm>
-            <a:off x="9555480" y="2258568"/>
-            <a:ext cx="822960" cy="457200"/>
+            <a:off x="3675888" y="2807208"/>
+            <a:ext cx="411480" cy="365760"/>
           </a:xfrm>
           <a:prstGeom prst="roundRect">
             <a:avLst>
@@ -4317,14 +4378,14 @@
       </p:sp>
       <p:sp>
         <p:nvSpPr>
-          <p:cNvPr id="14" name="Text 11"/>
-          <p:cNvSpPr txBox="1"/>
-          <p:nvPr/>
-        </p:nvSpPr>
-        <p:spPr>
-          <a:xfrm>
-            <a:off x="9555480" y="2258568"/>
-            <a:ext cx="822960" cy="457200"/>
+          <p:cNvPr id="16" name="Text 13"/>
+          <p:cNvSpPr txBox="1"/>
+          <p:nvPr/>
+        </p:nvSpPr>
+        <p:spPr>
+          <a:xfrm>
+            <a:off x="3675888" y="2807208"/>
+            <a:ext cx="411480" cy="365760"/>
           </a:xfrm>
           <a:prstGeom prst="rect">
             <a:avLst/>
@@ -4340,7 +4401,7 @@
               <a:buNone/>
             </a:pPr>
             <a:r>
-              <a:rPr lang="en-US" sz="2200" b="1" dirty="0">
+              <a:rPr lang="en-US" sz="1600" b="1" dirty="0">
                 <a:solidFill>
                   <a:srgbClr val="FFFFFF"/>
                 </a:solidFill>
@@ -4350,24 +4411,24 @@
               </a:rPr>
               <a:t>b</a:t>
             </a:r>
-            <a:endParaRPr lang="en-US" sz="2200" dirty="0"/>
-          </a:p>
-        </p:txBody>
-      </p:sp>
-      <p:sp>
-        <p:nvSpPr>
-          <p:cNvPr id="15" name="Shape 12"/>
+            <a:endParaRPr lang="en-US" sz="1600" dirty="0"/>
+          </a:p>
+        </p:txBody>
+      </p:sp>
+      <p:sp>
+        <p:nvSpPr>
+          <p:cNvPr id="17" name="Shape 14"/>
           <p:cNvSpPr/>
           <p:nvPr/>
         </p:nvSpPr>
         <p:spPr>
           <a:xfrm>
-            <a:off x="548640" y="2871216"/>
-            <a:ext cx="8778240" cy="548640"/>
+            <a:off x="548640" y="3392424"/>
+            <a:ext cx="3611880" cy="621792"/>
           </a:xfrm>
           <a:prstGeom prst="roundRect">
             <a:avLst>
-              <a:gd name="adj" fmla="val 13333"/>
+              <a:gd name="adj" fmla="val 7353"/>
             </a:avLst>
           </a:prstGeom>
           <a:solidFill>
@@ -4378,30 +4439,30 @@
       </p:sp>
       <p:sp>
         <p:nvSpPr>
-          <p:cNvPr id="16" name="Text 13"/>
-          <p:cNvSpPr txBox="1"/>
-          <p:nvPr/>
-        </p:nvSpPr>
-        <p:spPr>
-          <a:xfrm>
-            <a:off x="822960" y="2962656"/>
-            <a:ext cx="8412480" cy="411480"/>
-          </a:xfrm>
-          <a:prstGeom prst="rect">
-            <a:avLst/>
-          </a:prstGeom>
-          <a:noFill/>
-          <a:ln/>
-        </p:spPr>
-        <p:txBody>
-          <a:bodyPr wrap="square" lIns="0" tIns="0" rIns="0" bIns="0" rtlCol="0" anchor="t"/>
-          <a:lstStyle/>
-          <a:p>
-            <a:pPr indent="0" marL="0">
-              <a:buNone/>
-            </a:pPr>
-            <a:r>
-              <a:rPr lang="en-US" sz="2200" dirty="0">
+          <p:cNvPr id="18" name="Text 15"/>
+          <p:cNvSpPr txBox="1"/>
+          <p:nvPr/>
+        </p:nvSpPr>
+        <p:spPr>
+          <a:xfrm>
+            <a:off x="640080" y="3465576"/>
+            <a:ext cx="2971800" cy="502920"/>
+          </a:xfrm>
+          <a:prstGeom prst="rect">
+            <a:avLst/>
+          </a:prstGeom>
+          <a:noFill/>
+          <a:ln/>
+        </p:spPr>
+        <p:txBody>
+          <a:bodyPr wrap="square" lIns="0" tIns="0" rIns="0" bIns="0" rtlCol="0" anchor="ctr"/>
+          <a:lstStyle/>
+          <a:p>
+            <a:pPr indent="0" marL="0">
+              <a:buNone/>
+            </a:pPr>
+            <a:r>
+              <a:rPr lang="en-US" sz="1250" dirty="0">
                 <a:solidFill>
                   <a:srgbClr val="1E2761"/>
                 </a:solidFill>
@@ -4411,20 +4472,20 @@
               </a:rPr>
               <a:t>Der erste Versuch fällt mir schwer,</a:t>
             </a:r>
-            <a:endParaRPr lang="en-US" sz="2200" dirty="0"/>
-          </a:p>
-        </p:txBody>
-      </p:sp>
-      <p:sp>
-        <p:nvSpPr>
-          <p:cNvPr id="17" name="Shape 14"/>
+            <a:endParaRPr lang="en-US" sz="1250" dirty="0"/>
+          </a:p>
+        </p:txBody>
+      </p:sp>
+      <p:sp>
+        <p:nvSpPr>
+          <p:cNvPr id="19" name="Shape 16"/>
           <p:cNvSpPr/>
           <p:nvPr/>
         </p:nvSpPr>
         <p:spPr>
           <a:xfrm>
-            <a:off x="9555480" y="2916936"/>
-            <a:ext cx="822960" cy="457200"/>
+            <a:off x="3675888" y="3520440"/>
+            <a:ext cx="411480" cy="365760"/>
           </a:xfrm>
           <a:prstGeom prst="roundRect">
             <a:avLst>
@@ -4439,14 +4500,14 @@
       </p:sp>
       <p:sp>
         <p:nvSpPr>
-          <p:cNvPr id="18" name="Text 15"/>
-          <p:cNvSpPr txBox="1"/>
-          <p:nvPr/>
-        </p:nvSpPr>
-        <p:spPr>
-          <a:xfrm>
-            <a:off x="9555480" y="2916936"/>
-            <a:ext cx="822960" cy="457200"/>
+          <p:cNvPr id="20" name="Text 17"/>
+          <p:cNvSpPr txBox="1"/>
+          <p:nvPr/>
+        </p:nvSpPr>
+        <p:spPr>
+          <a:xfrm>
+            <a:off x="3675888" y="3520440"/>
+            <a:ext cx="411480" cy="365760"/>
           </a:xfrm>
           <a:prstGeom prst="rect">
             <a:avLst/>
@@ -4462,7 +4523,7 @@
               <a:buNone/>
             </a:pPr>
             <a:r>
-              <a:rPr lang="en-US" sz="2200" b="1" dirty="0">
+              <a:rPr lang="en-US" sz="1600" b="1" dirty="0">
                 <a:solidFill>
                   <a:srgbClr val="FFFFFF"/>
                 </a:solidFill>
@@ -4472,24 +4533,24 @@
               </a:rPr>
               <a:t>a</a:t>
             </a:r>
-            <a:endParaRPr lang="en-US" sz="2200" dirty="0"/>
-          </a:p>
-        </p:txBody>
-      </p:sp>
-      <p:sp>
-        <p:nvSpPr>
-          <p:cNvPr id="19" name="Shape 16"/>
+            <a:endParaRPr lang="en-US" sz="1600" dirty="0"/>
+          </a:p>
+        </p:txBody>
+      </p:sp>
+      <p:sp>
+        <p:nvSpPr>
+          <p:cNvPr id="21" name="Shape 18"/>
           <p:cNvSpPr/>
           <p:nvPr/>
         </p:nvSpPr>
         <p:spPr>
           <a:xfrm>
-            <a:off x="548640" y="3529584"/>
-            <a:ext cx="8778240" cy="548640"/>
+            <a:off x="548640" y="4105656"/>
+            <a:ext cx="3611880" cy="621792"/>
           </a:xfrm>
           <a:prstGeom prst="roundRect">
             <a:avLst>
-              <a:gd name="adj" fmla="val 13333"/>
+              <a:gd name="adj" fmla="val 7353"/>
             </a:avLst>
           </a:prstGeom>
           <a:solidFill>
@@ -4500,30 +4561,30 @@
       </p:sp>
       <p:sp>
         <p:nvSpPr>
-          <p:cNvPr id="20" name="Text 17"/>
-          <p:cNvSpPr txBox="1"/>
-          <p:nvPr/>
-        </p:nvSpPr>
-        <p:spPr>
-          <a:xfrm>
-            <a:off x="822960" y="3621024"/>
-            <a:ext cx="8412480" cy="411480"/>
-          </a:xfrm>
-          <a:prstGeom prst="rect">
-            <a:avLst/>
-          </a:prstGeom>
-          <a:noFill/>
-          <a:ln/>
-        </p:spPr>
-        <p:txBody>
-          <a:bodyPr wrap="square" lIns="0" tIns="0" rIns="0" bIns="0" rtlCol="0" anchor="t"/>
-          <a:lstStyle/>
-          <a:p>
-            <a:pPr indent="0" marL="0">
-              <a:buNone/>
-            </a:pPr>
-            <a:r>
-              <a:rPr lang="en-US" sz="2200" dirty="0">
+          <p:cNvPr id="22" name="Text 19"/>
+          <p:cNvSpPr txBox="1"/>
+          <p:nvPr/>
+        </p:nvSpPr>
+        <p:spPr>
+          <a:xfrm>
+            <a:off x="640080" y="4178808"/>
+            <a:ext cx="2971800" cy="502920"/>
+          </a:xfrm>
+          <a:prstGeom prst="rect">
+            <a:avLst/>
+          </a:prstGeom>
+          <a:noFill/>
+          <a:ln/>
+        </p:spPr>
+        <p:txBody>
+          <a:bodyPr wrap="square" lIns="0" tIns="0" rIns="0" bIns="0" rtlCol="0" anchor="ctr"/>
+          <a:lstStyle/>
+          <a:p>
+            <a:pPr indent="0" marL="0">
+              <a:buNone/>
+            </a:pPr>
+            <a:r>
+              <a:rPr lang="en-US" sz="1250" dirty="0">
                 <a:solidFill>
                   <a:srgbClr val="1E2761"/>
                 </a:solidFill>
@@ -4533,20 +4594,20 @@
               </a:rPr>
               <a:t>doch dann ruft jemand: „Ja!“</a:t>
             </a:r>
-            <a:endParaRPr lang="en-US" sz="2200" dirty="0"/>
-          </a:p>
-        </p:txBody>
-      </p:sp>
-      <p:sp>
-        <p:nvSpPr>
-          <p:cNvPr id="21" name="Shape 18"/>
+            <a:endParaRPr lang="en-US" sz="1250" dirty="0"/>
+          </a:p>
+        </p:txBody>
+      </p:sp>
+      <p:sp>
+        <p:nvSpPr>
+          <p:cNvPr id="23" name="Shape 20"/>
           <p:cNvSpPr/>
           <p:nvPr/>
         </p:nvSpPr>
         <p:spPr>
           <a:xfrm>
-            <a:off x="9555480" y="3575304"/>
-            <a:ext cx="822960" cy="457200"/>
+            <a:off x="3675888" y="4233672"/>
+            <a:ext cx="411480" cy="365760"/>
           </a:xfrm>
           <a:prstGeom prst="roundRect">
             <a:avLst>
@@ -4561,14 +4622,14 @@
       </p:sp>
       <p:sp>
         <p:nvSpPr>
-          <p:cNvPr id="22" name="Text 19"/>
-          <p:cNvSpPr txBox="1"/>
-          <p:nvPr/>
-        </p:nvSpPr>
-        <p:spPr>
-          <a:xfrm>
-            <a:off x="9555480" y="3575304"/>
-            <a:ext cx="822960" cy="457200"/>
+          <p:cNvPr id="24" name="Text 21"/>
+          <p:cNvSpPr txBox="1"/>
+          <p:nvPr/>
+        </p:nvSpPr>
+        <p:spPr>
+          <a:xfrm>
+            <a:off x="3675888" y="4233672"/>
+            <a:ext cx="411480" cy="365760"/>
           </a:xfrm>
           <a:prstGeom prst="rect">
             <a:avLst/>
@@ -4584,7 +4645,7 @@
               <a:buNone/>
             </a:pPr>
             <a:r>
-              <a:rPr lang="en-US" sz="2200" b="1" dirty="0">
+              <a:rPr lang="en-US" sz="1600" b="1" dirty="0">
                 <a:solidFill>
                   <a:srgbClr val="FFFFFF"/>
                 </a:solidFill>
@@ -4594,19 +4655,1117 @@
               </a:rPr>
               <a:t>b</a:t>
             </a:r>
-            <a:endParaRPr lang="en-US" sz="2200" dirty="0"/>
-          </a:p>
-        </p:txBody>
-      </p:sp>
-      <p:sp>
-        <p:nvSpPr>
-          <p:cNvPr id="23" name="Shape 20"/>
+            <a:endParaRPr lang="en-US" sz="1600" dirty="0"/>
+          </a:p>
+        </p:txBody>
+      </p:sp>
+      <p:sp>
+        <p:nvSpPr>
+          <p:cNvPr id="25" name="Shape 22"/>
           <p:cNvSpPr/>
           <p:nvPr/>
         </p:nvSpPr>
         <p:spPr>
           <a:xfrm>
-            <a:off x="548640" y="5074920"/>
+            <a:off x="4297680" y="1417320"/>
+            <a:ext cx="3611880" cy="411480"/>
+          </a:xfrm>
+          <a:prstGeom prst="roundRect">
+            <a:avLst>
+              <a:gd name="adj" fmla="val 11111"/>
+            </a:avLst>
+          </a:prstGeom>
+          <a:solidFill>
+            <a:srgbClr val="1E2761"/>
+          </a:solidFill>
+          <a:ln/>
+        </p:spPr>
+      </p:sp>
+      <p:sp>
+        <p:nvSpPr>
+          <p:cNvPr id="26" name="Text 23"/>
+          <p:cNvSpPr txBox="1"/>
+          <p:nvPr/>
+        </p:nvSpPr>
+        <p:spPr>
+          <a:xfrm>
+            <a:off x="4297680" y="1417320"/>
+            <a:ext cx="3611880" cy="411480"/>
+          </a:xfrm>
+          <a:prstGeom prst="rect">
+            <a:avLst/>
+          </a:prstGeom>
+          <a:noFill/>
+          <a:ln/>
+        </p:spPr>
+        <p:txBody>
+          <a:bodyPr wrap="square" lIns="0" tIns="0" rIns="0" bIns="0" rtlCol="0" anchor="ctr"/>
+          <a:lstStyle/>
+          <a:p>
+            <a:pPr algn="ctr" indent="0" marL="0">
+              <a:buNone/>
+            </a:pPr>
+            <a:r>
+              <a:rPr lang="en-US" sz="1500" b="1" dirty="0">
+                <a:solidFill>
+                  <a:srgbClr val="FFFFFF"/>
+                </a:solidFill>
+                <a:latin typeface="Calibri" pitchFamily="34" charset="0"/>
+                <a:ea typeface="Calibri" pitchFamily="34" charset="-122"/>
+                <a:cs typeface="Calibri" pitchFamily="34" charset="-120"/>
+              </a:rPr>
+              <a:t>Judo</a:t>
+            </a:r>
+            <a:endParaRPr lang="en-US" sz="1500" dirty="0"/>
+          </a:p>
+        </p:txBody>
+      </p:sp>
+      <p:sp>
+        <p:nvSpPr>
+          <p:cNvPr id="27" name="Shape 24"/>
+          <p:cNvSpPr/>
+          <p:nvPr/>
+        </p:nvSpPr>
+        <p:spPr>
+          <a:xfrm>
+            <a:off x="4297680" y="1965960"/>
+            <a:ext cx="3611880" cy="621792"/>
+          </a:xfrm>
+          <a:prstGeom prst="roundRect">
+            <a:avLst>
+              <a:gd name="adj" fmla="val 7353"/>
+            </a:avLst>
+          </a:prstGeom>
+          <a:solidFill>
+            <a:srgbClr val="F4F7FD"/>
+          </a:solidFill>
+          <a:ln/>
+        </p:spPr>
+      </p:sp>
+      <p:sp>
+        <p:nvSpPr>
+          <p:cNvPr id="28" name="Text 25"/>
+          <p:cNvSpPr txBox="1"/>
+          <p:nvPr/>
+        </p:nvSpPr>
+        <p:spPr>
+          <a:xfrm>
+            <a:off x="4389120" y="2039112"/>
+            <a:ext cx="2971800" cy="502920"/>
+          </a:xfrm>
+          <a:prstGeom prst="rect">
+            <a:avLst/>
+          </a:prstGeom>
+          <a:noFill/>
+          <a:ln/>
+        </p:spPr>
+        <p:txBody>
+          <a:bodyPr wrap="square" lIns="0" tIns="0" rIns="0" bIns="0" rtlCol="0" anchor="ctr"/>
+          <a:lstStyle/>
+          <a:p>
+            <a:pPr indent="0" marL="0">
+              <a:buNone/>
+            </a:pPr>
+            <a:r>
+              <a:rPr lang="en-US" sz="1250" dirty="0">
+                <a:solidFill>
+                  <a:srgbClr val="1E2761"/>
+                </a:solidFill>
+                <a:latin typeface="Cambria" pitchFamily="34" charset="0"/>
+                <a:ea typeface="Cambria" pitchFamily="34" charset="-122"/>
+                <a:cs typeface="Cambria" pitchFamily="34" charset="-120"/>
+              </a:rPr>
+              <a:t>Wir grüßen uns, der Kampf beginnt,</a:t>
+            </a:r>
+            <a:endParaRPr lang="en-US" sz="1250" dirty="0"/>
+          </a:p>
+        </p:txBody>
+      </p:sp>
+      <p:sp>
+        <p:nvSpPr>
+          <p:cNvPr id="29" name="Shape 26"/>
+          <p:cNvSpPr/>
+          <p:nvPr/>
+        </p:nvSpPr>
+        <p:spPr>
+          <a:xfrm>
+            <a:off x="7424928" y="2093976"/>
+            <a:ext cx="411480" cy="365760"/>
+          </a:xfrm>
+          <a:prstGeom prst="roundRect">
+            <a:avLst>
+              <a:gd name="adj" fmla="val 50000"/>
+            </a:avLst>
+          </a:prstGeom>
+          <a:solidFill>
+            <a:srgbClr val="2A8C8C"/>
+          </a:solidFill>
+          <a:ln/>
+        </p:spPr>
+      </p:sp>
+      <p:sp>
+        <p:nvSpPr>
+          <p:cNvPr id="30" name="Text 27"/>
+          <p:cNvSpPr txBox="1"/>
+          <p:nvPr/>
+        </p:nvSpPr>
+        <p:spPr>
+          <a:xfrm>
+            <a:off x="7424928" y="2093976"/>
+            <a:ext cx="411480" cy="365760"/>
+          </a:xfrm>
+          <a:prstGeom prst="rect">
+            <a:avLst/>
+          </a:prstGeom>
+          <a:noFill/>
+          <a:ln/>
+        </p:spPr>
+        <p:txBody>
+          <a:bodyPr wrap="square" lIns="0" tIns="0" rIns="0" bIns="0" rtlCol="0" anchor="ctr"/>
+          <a:lstStyle/>
+          <a:p>
+            <a:pPr algn="ctr" indent="0" marL="0">
+              <a:buNone/>
+            </a:pPr>
+            <a:r>
+              <a:rPr lang="en-US" sz="1600" b="1" dirty="0">
+                <a:solidFill>
+                  <a:srgbClr val="FFFFFF"/>
+                </a:solidFill>
+                <a:latin typeface="Calibri" pitchFamily="34" charset="0"/>
+                <a:ea typeface="Calibri" pitchFamily="34" charset="-122"/>
+                <a:cs typeface="Calibri" pitchFamily="34" charset="-120"/>
+              </a:rPr>
+              <a:t>a</a:t>
+            </a:r>
+            <a:endParaRPr lang="en-US" sz="1600" dirty="0"/>
+          </a:p>
+        </p:txBody>
+      </p:sp>
+      <p:sp>
+        <p:nvSpPr>
+          <p:cNvPr id="31" name="Shape 28"/>
+          <p:cNvSpPr/>
+          <p:nvPr/>
+        </p:nvSpPr>
+        <p:spPr>
+          <a:xfrm>
+            <a:off x="4297680" y="2679192"/>
+            <a:ext cx="3611880" cy="621792"/>
+          </a:xfrm>
+          <a:prstGeom prst="roundRect">
+            <a:avLst>
+              <a:gd name="adj" fmla="val 7353"/>
+            </a:avLst>
+          </a:prstGeom>
+          <a:solidFill>
+            <a:srgbClr val="F4F7FD"/>
+          </a:solidFill>
+          <a:ln/>
+        </p:spPr>
+      </p:sp>
+      <p:sp>
+        <p:nvSpPr>
+          <p:cNvPr id="32" name="Text 29"/>
+          <p:cNvSpPr txBox="1"/>
+          <p:nvPr/>
+        </p:nvSpPr>
+        <p:spPr>
+          <a:xfrm>
+            <a:off x="4389120" y="2752344"/>
+            <a:ext cx="2971800" cy="502920"/>
+          </a:xfrm>
+          <a:prstGeom prst="rect">
+            <a:avLst/>
+          </a:prstGeom>
+          <a:noFill/>
+          <a:ln/>
+        </p:spPr>
+        <p:txBody>
+          <a:bodyPr wrap="square" lIns="0" tIns="0" rIns="0" bIns="0" rtlCol="0" anchor="ctr"/>
+          <a:lstStyle/>
+          <a:p>
+            <a:pPr indent="0" marL="0">
+              <a:buNone/>
+            </a:pPr>
+            <a:r>
+              <a:rPr lang="en-US" sz="1250" dirty="0">
+                <a:solidFill>
+                  <a:srgbClr val="1E2761"/>
+                </a:solidFill>
+                <a:latin typeface="Cambria" pitchFamily="34" charset="0"/>
+                <a:ea typeface="Cambria" pitchFamily="34" charset="-122"/>
+                <a:cs typeface="Cambria" pitchFamily="34" charset="-120"/>
+              </a:rPr>
+              <a:t>am Ärmel spür ich seinen Griff.</a:t>
+            </a:r>
+            <a:endParaRPr lang="en-US" sz="1250" dirty="0"/>
+          </a:p>
+        </p:txBody>
+      </p:sp>
+      <p:sp>
+        <p:nvSpPr>
+          <p:cNvPr id="33" name="Shape 30"/>
+          <p:cNvSpPr/>
+          <p:nvPr/>
+        </p:nvSpPr>
+        <p:spPr>
+          <a:xfrm>
+            <a:off x="7424928" y="2807208"/>
+            <a:ext cx="411480" cy="365760"/>
+          </a:xfrm>
+          <a:prstGeom prst="roundRect">
+            <a:avLst>
+              <a:gd name="adj" fmla="val 50000"/>
+            </a:avLst>
+          </a:prstGeom>
+          <a:solidFill>
+            <a:srgbClr val="C77C12"/>
+          </a:solidFill>
+          <a:ln/>
+        </p:spPr>
+      </p:sp>
+      <p:sp>
+        <p:nvSpPr>
+          <p:cNvPr id="34" name="Text 31"/>
+          <p:cNvSpPr txBox="1"/>
+          <p:nvPr/>
+        </p:nvSpPr>
+        <p:spPr>
+          <a:xfrm>
+            <a:off x="7424928" y="2807208"/>
+            <a:ext cx="411480" cy="365760"/>
+          </a:xfrm>
+          <a:prstGeom prst="rect">
+            <a:avLst/>
+          </a:prstGeom>
+          <a:noFill/>
+          <a:ln/>
+        </p:spPr>
+        <p:txBody>
+          <a:bodyPr wrap="square" lIns="0" tIns="0" rIns="0" bIns="0" rtlCol="0" anchor="ctr"/>
+          <a:lstStyle/>
+          <a:p>
+            <a:pPr algn="ctr" indent="0" marL="0">
+              <a:buNone/>
+            </a:pPr>
+            <a:r>
+              <a:rPr lang="en-US" sz="1600" b="1" dirty="0">
+                <a:solidFill>
+                  <a:srgbClr val="FFFFFF"/>
+                </a:solidFill>
+                <a:latin typeface="Calibri" pitchFamily="34" charset="0"/>
+                <a:ea typeface="Calibri" pitchFamily="34" charset="-122"/>
+                <a:cs typeface="Calibri" pitchFamily="34" charset="-120"/>
+              </a:rPr>
+              <a:t>b</a:t>
+            </a:r>
+            <a:endParaRPr lang="en-US" sz="1600" dirty="0"/>
+          </a:p>
+        </p:txBody>
+      </p:sp>
+      <p:sp>
+        <p:nvSpPr>
+          <p:cNvPr id="35" name="Shape 32"/>
+          <p:cNvSpPr/>
+          <p:nvPr/>
+        </p:nvSpPr>
+        <p:spPr>
+          <a:xfrm>
+            <a:off x="4297680" y="3392424"/>
+            <a:ext cx="3611880" cy="621792"/>
+          </a:xfrm>
+          <a:prstGeom prst="roundRect">
+            <a:avLst>
+              <a:gd name="adj" fmla="val 7353"/>
+            </a:avLst>
+          </a:prstGeom>
+          <a:solidFill>
+            <a:srgbClr val="F4F7FD"/>
+          </a:solidFill>
+          <a:ln/>
+        </p:spPr>
+      </p:sp>
+      <p:sp>
+        <p:nvSpPr>
+          <p:cNvPr id="36" name="Text 33"/>
+          <p:cNvSpPr txBox="1"/>
+          <p:nvPr/>
+        </p:nvSpPr>
+        <p:spPr>
+          <a:xfrm>
+            <a:off x="4389120" y="3465576"/>
+            <a:ext cx="2971800" cy="502920"/>
+          </a:xfrm>
+          <a:prstGeom prst="rect">
+            <a:avLst/>
+          </a:prstGeom>
+          <a:noFill/>
+          <a:ln/>
+        </p:spPr>
+        <p:txBody>
+          <a:bodyPr wrap="square" lIns="0" tIns="0" rIns="0" bIns="0" rtlCol="0" anchor="ctr"/>
+          <a:lstStyle/>
+          <a:p>
+            <a:pPr indent="0" marL="0">
+              <a:buNone/>
+            </a:pPr>
+            <a:r>
+              <a:rPr lang="en-US" sz="1250" dirty="0">
+                <a:solidFill>
+                  <a:srgbClr val="1E2761"/>
+                </a:solidFill>
+                <a:latin typeface="Cambria" pitchFamily="34" charset="0"/>
+                <a:ea typeface="Cambria" pitchFamily="34" charset="-122"/>
+                <a:cs typeface="Cambria" pitchFamily="34" charset="-120"/>
+              </a:rPr>
+              <a:t>Ich weiß genau, wer heut gewinnt:</a:t>
+            </a:r>
+            <a:endParaRPr lang="en-US" sz="1250" dirty="0"/>
+          </a:p>
+        </p:txBody>
+      </p:sp>
+      <p:sp>
+        <p:nvSpPr>
+          <p:cNvPr id="37" name="Shape 34"/>
+          <p:cNvSpPr/>
+          <p:nvPr/>
+        </p:nvSpPr>
+        <p:spPr>
+          <a:xfrm>
+            <a:off x="7424928" y="3520440"/>
+            <a:ext cx="411480" cy="365760"/>
+          </a:xfrm>
+          <a:prstGeom prst="roundRect">
+            <a:avLst>
+              <a:gd name="adj" fmla="val 50000"/>
+            </a:avLst>
+          </a:prstGeom>
+          <a:solidFill>
+            <a:srgbClr val="2A8C8C"/>
+          </a:solidFill>
+          <a:ln/>
+        </p:spPr>
+      </p:sp>
+      <p:sp>
+        <p:nvSpPr>
+          <p:cNvPr id="38" name="Text 35"/>
+          <p:cNvSpPr txBox="1"/>
+          <p:nvPr/>
+        </p:nvSpPr>
+        <p:spPr>
+          <a:xfrm>
+            <a:off x="7424928" y="3520440"/>
+            <a:ext cx="411480" cy="365760"/>
+          </a:xfrm>
+          <a:prstGeom prst="rect">
+            <a:avLst/>
+          </a:prstGeom>
+          <a:noFill/>
+          <a:ln/>
+        </p:spPr>
+        <p:txBody>
+          <a:bodyPr wrap="square" lIns="0" tIns="0" rIns="0" bIns="0" rtlCol="0" anchor="ctr"/>
+          <a:lstStyle/>
+          <a:p>
+            <a:pPr algn="ctr" indent="0" marL="0">
+              <a:buNone/>
+            </a:pPr>
+            <a:r>
+              <a:rPr lang="en-US" sz="1600" b="1" dirty="0">
+                <a:solidFill>
+                  <a:srgbClr val="FFFFFF"/>
+                </a:solidFill>
+                <a:latin typeface="Calibri" pitchFamily="34" charset="0"/>
+                <a:ea typeface="Calibri" pitchFamily="34" charset="-122"/>
+                <a:cs typeface="Calibri" pitchFamily="34" charset="-120"/>
+              </a:rPr>
+              <a:t>a</a:t>
+            </a:r>
+            <a:endParaRPr lang="en-US" sz="1600" dirty="0"/>
+          </a:p>
+        </p:txBody>
+      </p:sp>
+      <p:sp>
+        <p:nvSpPr>
+          <p:cNvPr id="39" name="Shape 36"/>
+          <p:cNvSpPr/>
+          <p:nvPr/>
+        </p:nvSpPr>
+        <p:spPr>
+          <a:xfrm>
+            <a:off x="4297680" y="4105656"/>
+            <a:ext cx="3611880" cy="621792"/>
+          </a:xfrm>
+          <a:prstGeom prst="roundRect">
+            <a:avLst>
+              <a:gd name="adj" fmla="val 7353"/>
+            </a:avLst>
+          </a:prstGeom>
+          <a:solidFill>
+            <a:srgbClr val="F4F7FD"/>
+          </a:solidFill>
+          <a:ln/>
+        </p:spPr>
+      </p:sp>
+      <p:sp>
+        <p:nvSpPr>
+          <p:cNvPr id="40" name="Text 37"/>
+          <p:cNvSpPr txBox="1"/>
+          <p:nvPr/>
+        </p:nvSpPr>
+        <p:spPr>
+          <a:xfrm>
+            <a:off x="4389120" y="4178808"/>
+            <a:ext cx="2971800" cy="502920"/>
+          </a:xfrm>
+          <a:prstGeom prst="rect">
+            <a:avLst/>
+          </a:prstGeom>
+          <a:noFill/>
+          <a:ln/>
+        </p:spPr>
+        <p:txBody>
+          <a:bodyPr wrap="square" lIns="0" tIns="0" rIns="0" bIns="0" rtlCol="0" anchor="ctr"/>
+          <a:lstStyle/>
+          <a:p>
+            <a:pPr indent="0" marL="0">
+              <a:buNone/>
+            </a:pPr>
+            <a:r>
+              <a:rPr lang="en-US" sz="1250" dirty="0">
+                <a:solidFill>
+                  <a:srgbClr val="1E2761"/>
+                </a:solidFill>
+                <a:latin typeface="Cambria" pitchFamily="34" charset="0"/>
+                <a:ea typeface="Cambria" pitchFamily="34" charset="-122"/>
+                <a:cs typeface="Cambria" pitchFamily="34" charset="-120"/>
+              </a:rPr>
+              <a:t>wer schneller ist mit seinem Kniff.</a:t>
+            </a:r>
+            <a:endParaRPr lang="en-US" sz="1250" dirty="0"/>
+          </a:p>
+        </p:txBody>
+      </p:sp>
+      <p:sp>
+        <p:nvSpPr>
+          <p:cNvPr id="41" name="Shape 38"/>
+          <p:cNvSpPr/>
+          <p:nvPr/>
+        </p:nvSpPr>
+        <p:spPr>
+          <a:xfrm>
+            <a:off x="7424928" y="4233672"/>
+            <a:ext cx="411480" cy="365760"/>
+          </a:xfrm>
+          <a:prstGeom prst="roundRect">
+            <a:avLst>
+              <a:gd name="adj" fmla="val 50000"/>
+            </a:avLst>
+          </a:prstGeom>
+          <a:solidFill>
+            <a:srgbClr val="C77C12"/>
+          </a:solidFill>
+          <a:ln/>
+        </p:spPr>
+      </p:sp>
+      <p:sp>
+        <p:nvSpPr>
+          <p:cNvPr id="42" name="Text 39"/>
+          <p:cNvSpPr txBox="1"/>
+          <p:nvPr/>
+        </p:nvSpPr>
+        <p:spPr>
+          <a:xfrm>
+            <a:off x="7424928" y="4233672"/>
+            <a:ext cx="411480" cy="365760"/>
+          </a:xfrm>
+          <a:prstGeom prst="rect">
+            <a:avLst/>
+          </a:prstGeom>
+          <a:noFill/>
+          <a:ln/>
+        </p:spPr>
+        <p:txBody>
+          <a:bodyPr wrap="square" lIns="0" tIns="0" rIns="0" bIns="0" rtlCol="0" anchor="ctr"/>
+          <a:lstStyle/>
+          <a:p>
+            <a:pPr algn="ctr" indent="0" marL="0">
+              <a:buNone/>
+            </a:pPr>
+            <a:r>
+              <a:rPr lang="en-US" sz="1600" b="1" dirty="0">
+                <a:solidFill>
+                  <a:srgbClr val="FFFFFF"/>
+                </a:solidFill>
+                <a:latin typeface="Calibri" pitchFamily="34" charset="0"/>
+                <a:ea typeface="Calibri" pitchFamily="34" charset="-122"/>
+                <a:cs typeface="Calibri" pitchFamily="34" charset="-120"/>
+              </a:rPr>
+              <a:t>b</a:t>
+            </a:r>
+            <a:endParaRPr lang="en-US" sz="1600" dirty="0"/>
+          </a:p>
+        </p:txBody>
+      </p:sp>
+      <p:sp>
+        <p:nvSpPr>
+          <p:cNvPr id="43" name="Shape 40"/>
+          <p:cNvSpPr/>
+          <p:nvPr/>
+        </p:nvSpPr>
+        <p:spPr>
+          <a:xfrm>
+            <a:off x="8046720" y="1417320"/>
+            <a:ext cx="3611880" cy="411480"/>
+          </a:xfrm>
+          <a:prstGeom prst="roundRect">
+            <a:avLst>
+              <a:gd name="adj" fmla="val 11111"/>
+            </a:avLst>
+          </a:prstGeom>
+          <a:solidFill>
+            <a:srgbClr val="1E2761"/>
+          </a:solidFill>
+          <a:ln/>
+        </p:spPr>
+      </p:sp>
+      <p:sp>
+        <p:nvSpPr>
+          <p:cNvPr id="44" name="Text 41"/>
+          <p:cNvSpPr txBox="1"/>
+          <p:nvPr/>
+        </p:nvSpPr>
+        <p:spPr>
+          <a:xfrm>
+            <a:off x="8046720" y="1417320"/>
+            <a:ext cx="3611880" cy="411480"/>
+          </a:xfrm>
+          <a:prstGeom prst="rect">
+            <a:avLst/>
+          </a:prstGeom>
+          <a:noFill/>
+          <a:ln/>
+        </p:spPr>
+        <p:txBody>
+          <a:bodyPr wrap="square" lIns="0" tIns="0" rIns="0" bIns="0" rtlCol="0" anchor="ctr"/>
+          <a:lstStyle/>
+          <a:p>
+            <a:pPr algn="ctr" indent="0" marL="0">
+              <a:buNone/>
+            </a:pPr>
+            <a:r>
+              <a:rPr lang="en-US" sz="1500" b="1" dirty="0">
+                <a:solidFill>
+                  <a:srgbClr val="FFFFFF"/>
+                </a:solidFill>
+                <a:latin typeface="Calibri" pitchFamily="34" charset="0"/>
+                <a:ea typeface="Calibri" pitchFamily="34" charset="-122"/>
+                <a:cs typeface="Calibri" pitchFamily="34" charset="-120"/>
+              </a:rPr>
+              <a:t>Handball</a:t>
+            </a:r>
+            <a:endParaRPr lang="en-US" sz="1500" dirty="0"/>
+          </a:p>
+        </p:txBody>
+      </p:sp>
+      <p:sp>
+        <p:nvSpPr>
+          <p:cNvPr id="45" name="Shape 42"/>
+          <p:cNvSpPr/>
+          <p:nvPr/>
+        </p:nvSpPr>
+        <p:spPr>
+          <a:xfrm>
+            <a:off x="8046720" y="1965960"/>
+            <a:ext cx="3611880" cy="621792"/>
+          </a:xfrm>
+          <a:prstGeom prst="roundRect">
+            <a:avLst>
+              <a:gd name="adj" fmla="val 7353"/>
+            </a:avLst>
+          </a:prstGeom>
+          <a:solidFill>
+            <a:srgbClr val="F4F7FD"/>
+          </a:solidFill>
+          <a:ln/>
+        </p:spPr>
+      </p:sp>
+      <p:sp>
+        <p:nvSpPr>
+          <p:cNvPr id="46" name="Text 43"/>
+          <p:cNvSpPr txBox="1"/>
+          <p:nvPr/>
+        </p:nvSpPr>
+        <p:spPr>
+          <a:xfrm>
+            <a:off x="8138160" y="2039112"/>
+            <a:ext cx="2971800" cy="502920"/>
+          </a:xfrm>
+          <a:prstGeom prst="rect">
+            <a:avLst/>
+          </a:prstGeom>
+          <a:noFill/>
+          <a:ln/>
+        </p:spPr>
+        <p:txBody>
+          <a:bodyPr wrap="square" lIns="0" tIns="0" rIns="0" bIns="0" rtlCol="0" anchor="ctr"/>
+          <a:lstStyle/>
+          <a:p>
+            <a:pPr indent="0" marL="0">
+              <a:buNone/>
+            </a:pPr>
+            <a:r>
+              <a:rPr lang="en-US" sz="1250" dirty="0">
+                <a:solidFill>
+                  <a:srgbClr val="1E2761"/>
+                </a:solidFill>
+                <a:latin typeface="Cambria" pitchFamily="34" charset="0"/>
+                <a:ea typeface="Cambria" pitchFamily="34" charset="-122"/>
+                <a:cs typeface="Cambria" pitchFamily="34" charset="-120"/>
+              </a:rPr>
+              <a:t>Der Pass kommt flach, ich bin jetzt dran,</a:t>
+            </a:r>
+            <a:endParaRPr lang="en-US" sz="1250" dirty="0"/>
+          </a:p>
+        </p:txBody>
+      </p:sp>
+      <p:sp>
+        <p:nvSpPr>
+          <p:cNvPr id="47" name="Shape 44"/>
+          <p:cNvSpPr/>
+          <p:nvPr/>
+        </p:nvSpPr>
+        <p:spPr>
+          <a:xfrm>
+            <a:off x="11173968" y="2093976"/>
+            <a:ext cx="411480" cy="365760"/>
+          </a:xfrm>
+          <a:prstGeom prst="roundRect">
+            <a:avLst>
+              <a:gd name="adj" fmla="val 50000"/>
+            </a:avLst>
+          </a:prstGeom>
+          <a:solidFill>
+            <a:srgbClr val="2A8C8C"/>
+          </a:solidFill>
+          <a:ln/>
+        </p:spPr>
+      </p:sp>
+      <p:sp>
+        <p:nvSpPr>
+          <p:cNvPr id="48" name="Text 45"/>
+          <p:cNvSpPr txBox="1"/>
+          <p:nvPr/>
+        </p:nvSpPr>
+        <p:spPr>
+          <a:xfrm>
+            <a:off x="11173968" y="2093976"/>
+            <a:ext cx="411480" cy="365760"/>
+          </a:xfrm>
+          <a:prstGeom prst="rect">
+            <a:avLst/>
+          </a:prstGeom>
+          <a:noFill/>
+          <a:ln/>
+        </p:spPr>
+        <p:txBody>
+          <a:bodyPr wrap="square" lIns="0" tIns="0" rIns="0" bIns="0" rtlCol="0" anchor="ctr"/>
+          <a:lstStyle/>
+          <a:p>
+            <a:pPr algn="ctr" indent="0" marL="0">
+              <a:buNone/>
+            </a:pPr>
+            <a:r>
+              <a:rPr lang="en-US" sz="1600" b="1" dirty="0">
+                <a:solidFill>
+                  <a:srgbClr val="FFFFFF"/>
+                </a:solidFill>
+                <a:latin typeface="Calibri" pitchFamily="34" charset="0"/>
+                <a:ea typeface="Calibri" pitchFamily="34" charset="-122"/>
+                <a:cs typeface="Calibri" pitchFamily="34" charset="-120"/>
+              </a:rPr>
+              <a:t>a</a:t>
+            </a:r>
+            <a:endParaRPr lang="en-US" sz="1600" dirty="0"/>
+          </a:p>
+        </p:txBody>
+      </p:sp>
+      <p:sp>
+        <p:nvSpPr>
+          <p:cNvPr id="49" name="Shape 46"/>
+          <p:cNvSpPr/>
+          <p:nvPr/>
+        </p:nvSpPr>
+        <p:spPr>
+          <a:xfrm>
+            <a:off x="8046720" y="2679192"/>
+            <a:ext cx="3611880" cy="621792"/>
+          </a:xfrm>
+          <a:prstGeom prst="roundRect">
+            <a:avLst>
+              <a:gd name="adj" fmla="val 7353"/>
+            </a:avLst>
+          </a:prstGeom>
+          <a:solidFill>
+            <a:srgbClr val="F4F7FD"/>
+          </a:solidFill>
+          <a:ln/>
+        </p:spPr>
+      </p:sp>
+      <p:sp>
+        <p:nvSpPr>
+          <p:cNvPr id="50" name="Text 47"/>
+          <p:cNvSpPr txBox="1"/>
+          <p:nvPr/>
+        </p:nvSpPr>
+        <p:spPr>
+          <a:xfrm>
+            <a:off x="8138160" y="2752344"/>
+            <a:ext cx="2971800" cy="502920"/>
+          </a:xfrm>
+          <a:prstGeom prst="rect">
+            <a:avLst/>
+          </a:prstGeom>
+          <a:noFill/>
+          <a:ln/>
+        </p:spPr>
+        <p:txBody>
+          <a:bodyPr wrap="square" lIns="0" tIns="0" rIns="0" bIns="0" rtlCol="0" anchor="ctr"/>
+          <a:lstStyle/>
+          <a:p>
+            <a:pPr indent="0" marL="0">
+              <a:buNone/>
+            </a:pPr>
+            <a:r>
+              <a:rPr lang="en-US" sz="1250" dirty="0">
+                <a:solidFill>
+                  <a:srgbClr val="1E2761"/>
+                </a:solidFill>
+                <a:latin typeface="Cambria" pitchFamily="34" charset="0"/>
+                <a:ea typeface="Cambria" pitchFamily="34" charset="-122"/>
+                <a:cs typeface="Cambria" pitchFamily="34" charset="-120"/>
+              </a:rPr>
+              <a:t>die Abwehr steht ganz dicht.</a:t>
+            </a:r>
+            <a:endParaRPr lang="en-US" sz="1250" dirty="0"/>
+          </a:p>
+        </p:txBody>
+      </p:sp>
+      <p:sp>
+        <p:nvSpPr>
+          <p:cNvPr id="51" name="Shape 48"/>
+          <p:cNvSpPr/>
+          <p:nvPr/>
+        </p:nvSpPr>
+        <p:spPr>
+          <a:xfrm>
+            <a:off x="11173968" y="2807208"/>
+            <a:ext cx="411480" cy="365760"/>
+          </a:xfrm>
+          <a:prstGeom prst="roundRect">
+            <a:avLst>
+              <a:gd name="adj" fmla="val 50000"/>
+            </a:avLst>
+          </a:prstGeom>
+          <a:solidFill>
+            <a:srgbClr val="C77C12"/>
+          </a:solidFill>
+          <a:ln/>
+        </p:spPr>
+      </p:sp>
+      <p:sp>
+        <p:nvSpPr>
+          <p:cNvPr id="52" name="Text 49"/>
+          <p:cNvSpPr txBox="1"/>
+          <p:nvPr/>
+        </p:nvSpPr>
+        <p:spPr>
+          <a:xfrm>
+            <a:off x="11173968" y="2807208"/>
+            <a:ext cx="411480" cy="365760"/>
+          </a:xfrm>
+          <a:prstGeom prst="rect">
+            <a:avLst/>
+          </a:prstGeom>
+          <a:noFill/>
+          <a:ln/>
+        </p:spPr>
+        <p:txBody>
+          <a:bodyPr wrap="square" lIns="0" tIns="0" rIns="0" bIns="0" rtlCol="0" anchor="ctr"/>
+          <a:lstStyle/>
+          <a:p>
+            <a:pPr algn="ctr" indent="0" marL="0">
+              <a:buNone/>
+            </a:pPr>
+            <a:r>
+              <a:rPr lang="en-US" sz="1600" b="1" dirty="0">
+                <a:solidFill>
+                  <a:srgbClr val="FFFFFF"/>
+                </a:solidFill>
+                <a:latin typeface="Calibri" pitchFamily="34" charset="0"/>
+                <a:ea typeface="Calibri" pitchFamily="34" charset="-122"/>
+                <a:cs typeface="Calibri" pitchFamily="34" charset="-120"/>
+              </a:rPr>
+              <a:t>b</a:t>
+            </a:r>
+            <a:endParaRPr lang="en-US" sz="1600" dirty="0"/>
+          </a:p>
+        </p:txBody>
+      </p:sp>
+      <p:sp>
+        <p:nvSpPr>
+          <p:cNvPr id="53" name="Shape 50"/>
+          <p:cNvSpPr/>
+          <p:nvPr/>
+        </p:nvSpPr>
+        <p:spPr>
+          <a:xfrm>
+            <a:off x="8046720" y="3392424"/>
+            <a:ext cx="3611880" cy="621792"/>
+          </a:xfrm>
+          <a:prstGeom prst="roundRect">
+            <a:avLst>
+              <a:gd name="adj" fmla="val 7353"/>
+            </a:avLst>
+          </a:prstGeom>
+          <a:solidFill>
+            <a:srgbClr val="F4F7FD"/>
+          </a:solidFill>
+          <a:ln/>
+        </p:spPr>
+      </p:sp>
+      <p:sp>
+        <p:nvSpPr>
+          <p:cNvPr id="54" name="Text 51"/>
+          <p:cNvSpPr txBox="1"/>
+          <p:nvPr/>
+        </p:nvSpPr>
+        <p:spPr>
+          <a:xfrm>
+            <a:off x="8138160" y="3465576"/>
+            <a:ext cx="2971800" cy="502920"/>
+          </a:xfrm>
+          <a:prstGeom prst="rect">
+            <a:avLst/>
+          </a:prstGeom>
+          <a:noFill/>
+          <a:ln/>
+        </p:spPr>
+        <p:txBody>
+          <a:bodyPr wrap="square" lIns="0" tIns="0" rIns="0" bIns="0" rtlCol="0" anchor="ctr"/>
+          <a:lstStyle/>
+          <a:p>
+            <a:pPr indent="0" marL="0">
+              <a:buNone/>
+            </a:pPr>
+            <a:r>
+              <a:rPr lang="en-US" sz="1250" dirty="0">
+                <a:solidFill>
+                  <a:srgbClr val="1E2761"/>
+                </a:solidFill>
+                <a:latin typeface="Cambria" pitchFamily="34" charset="0"/>
+                <a:ea typeface="Cambria" pitchFamily="34" charset="-122"/>
+                <a:cs typeface="Cambria" pitchFamily="34" charset="-120"/>
+              </a:rPr>
+              <a:t>Ich täusche links, der Gegner kann</a:t>
+            </a:r>
+            <a:endParaRPr lang="en-US" sz="1250" dirty="0"/>
+          </a:p>
+        </p:txBody>
+      </p:sp>
+      <p:sp>
+        <p:nvSpPr>
+          <p:cNvPr id="55" name="Shape 52"/>
+          <p:cNvSpPr/>
+          <p:nvPr/>
+        </p:nvSpPr>
+        <p:spPr>
+          <a:xfrm>
+            <a:off x="11173968" y="3520440"/>
+            <a:ext cx="411480" cy="365760"/>
+          </a:xfrm>
+          <a:prstGeom prst="roundRect">
+            <a:avLst>
+              <a:gd name="adj" fmla="val 50000"/>
+            </a:avLst>
+          </a:prstGeom>
+          <a:solidFill>
+            <a:srgbClr val="2A8C8C"/>
+          </a:solidFill>
+          <a:ln/>
+        </p:spPr>
+      </p:sp>
+      <p:sp>
+        <p:nvSpPr>
+          <p:cNvPr id="56" name="Text 53"/>
+          <p:cNvSpPr txBox="1"/>
+          <p:nvPr/>
+        </p:nvSpPr>
+        <p:spPr>
+          <a:xfrm>
+            <a:off x="11173968" y="3520440"/>
+            <a:ext cx="411480" cy="365760"/>
+          </a:xfrm>
+          <a:prstGeom prst="rect">
+            <a:avLst/>
+          </a:prstGeom>
+          <a:noFill/>
+          <a:ln/>
+        </p:spPr>
+        <p:txBody>
+          <a:bodyPr wrap="square" lIns="0" tIns="0" rIns="0" bIns="0" rtlCol="0" anchor="ctr"/>
+          <a:lstStyle/>
+          <a:p>
+            <a:pPr algn="ctr" indent="0" marL="0">
+              <a:buNone/>
+            </a:pPr>
+            <a:r>
+              <a:rPr lang="en-US" sz="1600" b="1" dirty="0">
+                <a:solidFill>
+                  <a:srgbClr val="FFFFFF"/>
+                </a:solidFill>
+                <a:latin typeface="Calibri" pitchFamily="34" charset="0"/>
+                <a:ea typeface="Calibri" pitchFamily="34" charset="-122"/>
+                <a:cs typeface="Calibri" pitchFamily="34" charset="-120"/>
+              </a:rPr>
+              <a:t>a</a:t>
+            </a:r>
+            <a:endParaRPr lang="en-US" sz="1600" dirty="0"/>
+          </a:p>
+        </p:txBody>
+      </p:sp>
+      <p:sp>
+        <p:nvSpPr>
+          <p:cNvPr id="57" name="Shape 54"/>
+          <p:cNvSpPr/>
+          <p:nvPr/>
+        </p:nvSpPr>
+        <p:spPr>
+          <a:xfrm>
+            <a:off x="8046720" y="4105656"/>
+            <a:ext cx="3611880" cy="621792"/>
+          </a:xfrm>
+          <a:prstGeom prst="roundRect">
+            <a:avLst>
+              <a:gd name="adj" fmla="val 7353"/>
+            </a:avLst>
+          </a:prstGeom>
+          <a:solidFill>
+            <a:srgbClr val="F4F7FD"/>
+          </a:solidFill>
+          <a:ln/>
+        </p:spPr>
+      </p:sp>
+      <p:sp>
+        <p:nvSpPr>
+          <p:cNvPr id="58" name="Text 55"/>
+          <p:cNvSpPr txBox="1"/>
+          <p:nvPr/>
+        </p:nvSpPr>
+        <p:spPr>
+          <a:xfrm>
+            <a:off x="8138160" y="4178808"/>
+            <a:ext cx="2971800" cy="502920"/>
+          </a:xfrm>
+          <a:prstGeom prst="rect">
+            <a:avLst/>
+          </a:prstGeom>
+          <a:noFill/>
+          <a:ln/>
+        </p:spPr>
+        <p:txBody>
+          <a:bodyPr wrap="square" lIns="0" tIns="0" rIns="0" bIns="0" rtlCol="0" anchor="ctr"/>
+          <a:lstStyle/>
+          <a:p>
+            <a:pPr indent="0" marL="0">
+              <a:buNone/>
+            </a:pPr>
+            <a:r>
+              <a:rPr lang="en-US" sz="1250" dirty="0">
+                <a:solidFill>
+                  <a:srgbClr val="1E2761"/>
+                </a:solidFill>
+                <a:latin typeface="Cambria" pitchFamily="34" charset="0"/>
+                <a:ea typeface="Cambria" pitchFamily="34" charset="-122"/>
+                <a:cs typeface="Cambria" pitchFamily="34" charset="-120"/>
+              </a:rPr>
+              <a:t>mich halten – heute nicht!</a:t>
+            </a:r>
+            <a:endParaRPr lang="en-US" sz="1250" dirty="0"/>
+          </a:p>
+        </p:txBody>
+      </p:sp>
+      <p:sp>
+        <p:nvSpPr>
+          <p:cNvPr id="59" name="Shape 56"/>
+          <p:cNvSpPr/>
+          <p:nvPr/>
+        </p:nvSpPr>
+        <p:spPr>
+          <a:xfrm>
+            <a:off x="11173968" y="4233672"/>
+            <a:ext cx="411480" cy="365760"/>
+          </a:xfrm>
+          <a:prstGeom prst="roundRect">
+            <a:avLst>
+              <a:gd name="adj" fmla="val 50000"/>
+            </a:avLst>
+          </a:prstGeom>
+          <a:solidFill>
+            <a:srgbClr val="C77C12"/>
+          </a:solidFill>
+          <a:ln/>
+        </p:spPr>
+      </p:sp>
+      <p:sp>
+        <p:nvSpPr>
+          <p:cNvPr id="60" name="Text 57"/>
+          <p:cNvSpPr txBox="1"/>
+          <p:nvPr/>
+        </p:nvSpPr>
+        <p:spPr>
+          <a:xfrm>
+            <a:off x="11173968" y="4233672"/>
+            <a:ext cx="411480" cy="365760"/>
+          </a:xfrm>
+          <a:prstGeom prst="rect">
+            <a:avLst/>
+          </a:prstGeom>
+          <a:noFill/>
+          <a:ln/>
+        </p:spPr>
+        <p:txBody>
+          <a:bodyPr wrap="square" lIns="0" tIns="0" rIns="0" bIns="0" rtlCol="0" anchor="ctr"/>
+          <a:lstStyle/>
+          <a:p>
+            <a:pPr algn="ctr" indent="0" marL="0">
+              <a:buNone/>
+            </a:pPr>
+            <a:r>
+              <a:rPr lang="en-US" sz="1600" b="1" dirty="0">
+                <a:solidFill>
+                  <a:srgbClr val="FFFFFF"/>
+                </a:solidFill>
+                <a:latin typeface="Calibri" pitchFamily="34" charset="0"/>
+                <a:ea typeface="Calibri" pitchFamily="34" charset="-122"/>
+                <a:cs typeface="Calibri" pitchFamily="34" charset="-120"/>
+              </a:rPr>
+              <a:t>b</a:t>
+            </a:r>
+            <a:endParaRPr lang="en-US" sz="1600" dirty="0"/>
+          </a:p>
+        </p:txBody>
+      </p:sp>
+      <p:sp>
+        <p:nvSpPr>
+          <p:cNvPr id="61" name="Shape 58"/>
+          <p:cNvSpPr/>
+          <p:nvPr/>
+        </p:nvSpPr>
+        <p:spPr>
+          <a:xfrm>
+            <a:off x="548640" y="4983480"/>
             <a:ext cx="11064240" cy="777240"/>
           </a:xfrm>
           <a:prstGeom prst="roundRect">
@@ -4622,13 +5781,13 @@
       </p:sp>
       <p:sp>
         <p:nvSpPr>
-          <p:cNvPr id="24" name="Text 21"/>
-          <p:cNvSpPr txBox="1"/>
-          <p:nvPr/>
-        </p:nvSpPr>
-        <p:spPr>
-          <a:xfrm>
-            <a:off x="822960" y="5230368"/>
+          <p:cNvPr id="62" name="Text 59"/>
+          <p:cNvSpPr txBox="1"/>
+          <p:nvPr/>
+        </p:nvSpPr>
+        <p:spPr>
+          <a:xfrm>
+            <a:off x="822960" y="5138928"/>
             <a:ext cx="10607040" cy="502920"/>
           </a:xfrm>
           <a:prstGeom prst="rect">
@@ -4668,6 +5827,20 @@
                 <a:cs typeface="Calibri" pitchFamily="34" charset="-120"/>
               </a:rPr>
               <a:t>Kreuzreim (abab)</a:t>
+            </a:r>
+            <a:pPr indent="0" marL="0">
+              <a:buNone/>
+            </a:pPr>
+            <a:r>
+              <a:rPr lang="en-US" sz="2400" dirty="0">
+                <a:solidFill>
+                  <a:srgbClr val="1E2761"/>
+                </a:solidFill>
+                <a:latin typeface="Calibri" pitchFamily="34" charset="0"/>
+                <a:ea typeface="Calibri" pitchFamily="34" charset="-122"/>
+                <a:cs typeface="Calibri" pitchFamily="34" charset="-120"/>
+              </a:rPr>
+              <a:t>  – in allen drei Fassungen</a:t>
             </a:r>
             <a:endParaRPr lang="en-US" sz="2400" dirty="0"/>
           </a:p>
@@ -4777,7 +5950,7 @@
                 <a:ea typeface="Cambria" pitchFamily="34" charset="-122"/>
                 <a:cs typeface="Cambria" pitchFamily="34" charset="-120"/>
               </a:rPr>
-              <a:t>Ü3  Lösung – 3  Auf der Matte</a:t>
+              <a:t>Ü3  Lösung – Nr. 3: umarmender Reim (abba)</a:t>
             </a:r>
             <a:endParaRPr lang="en-US" sz="3200" dirty="0"/>
           </a:p>
@@ -4869,12 +6042,73 @@
         </p:nvSpPr>
         <p:spPr>
           <a:xfrm>
-            <a:off x="548640" y="1554480"/>
-            <a:ext cx="8778240" cy="548640"/>
+            <a:off x="548640" y="1417320"/>
+            <a:ext cx="3611880" cy="411480"/>
           </a:xfrm>
           <a:prstGeom prst="roundRect">
             <a:avLst>
-              <a:gd name="adj" fmla="val 13333"/>
+              <a:gd name="adj" fmla="val 11111"/>
+            </a:avLst>
+          </a:prstGeom>
+          <a:solidFill>
+            <a:srgbClr val="1E2761"/>
+          </a:solidFill>
+          <a:ln/>
+        </p:spPr>
+      </p:sp>
+      <p:sp>
+        <p:nvSpPr>
+          <p:cNvPr id="8" name="Text 5"/>
+          <p:cNvSpPr txBox="1"/>
+          <p:nvPr/>
+        </p:nvSpPr>
+        <p:spPr>
+          <a:xfrm>
+            <a:off x="548640" y="1417320"/>
+            <a:ext cx="3611880" cy="411480"/>
+          </a:xfrm>
+          <a:prstGeom prst="rect">
+            <a:avLst/>
+          </a:prstGeom>
+          <a:noFill/>
+          <a:ln/>
+        </p:spPr>
+        <p:txBody>
+          <a:bodyPr wrap="square" lIns="0" tIns="0" rIns="0" bIns="0" rtlCol="0" anchor="ctr"/>
+          <a:lstStyle/>
+          <a:p>
+            <a:pPr algn="ctr" indent="0" marL="0">
+              <a:buNone/>
+            </a:pPr>
+            <a:r>
+              <a:rPr lang="en-US" sz="1500" b="1" dirty="0">
+                <a:solidFill>
+                  <a:srgbClr val="FFFFFF"/>
+                </a:solidFill>
+                <a:latin typeface="Calibri" pitchFamily="34" charset="0"/>
+                <a:ea typeface="Calibri" pitchFamily="34" charset="-122"/>
+                <a:cs typeface="Calibri" pitchFamily="34" charset="-120"/>
+              </a:rPr>
+              <a:t>Gewichtheben</a:t>
+            </a:r>
+            <a:endParaRPr lang="en-US" sz="1500" dirty="0"/>
+          </a:p>
+        </p:txBody>
+      </p:sp>
+      <p:sp>
+        <p:nvSpPr>
+          <p:cNvPr id="9" name="Shape 6"/>
+          <p:cNvSpPr/>
+          <p:nvPr/>
+        </p:nvSpPr>
+        <p:spPr>
+          <a:xfrm>
+            <a:off x="548640" y="1965960"/>
+            <a:ext cx="3611880" cy="621792"/>
+          </a:xfrm>
+          <a:prstGeom prst="roundRect">
+            <a:avLst>
+              <a:gd name="adj" fmla="val 7353"/>
             </a:avLst>
           </a:prstGeom>
           <a:solidFill>
@@ -4885,30 +6119,30 @@
       </p:sp>
       <p:sp>
         <p:nvSpPr>
-          <p:cNvPr id="8" name="Text 5"/>
-          <p:cNvSpPr txBox="1"/>
-          <p:nvPr/>
-        </p:nvSpPr>
-        <p:spPr>
-          <a:xfrm>
-            <a:off x="822960" y="1645920"/>
-            <a:ext cx="8412480" cy="411480"/>
-          </a:xfrm>
-          <a:prstGeom prst="rect">
-            <a:avLst/>
-          </a:prstGeom>
-          <a:noFill/>
-          <a:ln/>
-        </p:spPr>
-        <p:txBody>
-          <a:bodyPr wrap="square" lIns="0" tIns="0" rIns="0" bIns="0" rtlCol="0" anchor="t"/>
-          <a:lstStyle/>
-          <a:p>
-            <a:pPr indent="0" marL="0">
-              <a:buNone/>
-            </a:pPr>
-            <a:r>
-              <a:rPr lang="en-US" sz="2200" dirty="0">
+          <p:cNvPr id="10" name="Text 7"/>
+          <p:cNvSpPr txBox="1"/>
+          <p:nvPr/>
+        </p:nvSpPr>
+        <p:spPr>
+          <a:xfrm>
+            <a:off x="640080" y="2039112"/>
+            <a:ext cx="2971800" cy="502920"/>
+          </a:xfrm>
+          <a:prstGeom prst="rect">
+            <a:avLst/>
+          </a:prstGeom>
+          <a:noFill/>
+          <a:ln/>
+        </p:spPr>
+        <p:txBody>
+          <a:bodyPr wrap="square" lIns="0" tIns="0" rIns="0" bIns="0" rtlCol="0" anchor="ctr"/>
+          <a:lstStyle/>
+          <a:p>
+            <a:pPr indent="0" marL="0">
+              <a:buNone/>
+            </a:pPr>
+            <a:r>
+              <a:rPr lang="en-US" sz="1250" dirty="0">
                 <a:solidFill>
                   <a:srgbClr val="1E2761"/>
                 </a:solidFill>
@@ -4916,22 +6150,22 @@
                 <a:ea typeface="Cambria" pitchFamily="34" charset="-122"/>
                 <a:cs typeface="Cambria" pitchFamily="34" charset="-120"/>
               </a:rPr>
-              <a:t>Der Kampf beginnt, ich greife zu,</a:t>
-            </a:r>
-            <a:endParaRPr lang="en-US" sz="2200" dirty="0"/>
-          </a:p>
-        </p:txBody>
-      </p:sp>
-      <p:sp>
-        <p:nvSpPr>
-          <p:cNvPr id="9" name="Shape 6"/>
+              <a:t>Der letzte Versuch, die Halle schweigt,</a:t>
+            </a:r>
+            <a:endParaRPr lang="en-US" sz="1250" dirty="0"/>
+          </a:p>
+        </p:txBody>
+      </p:sp>
+      <p:sp>
+        <p:nvSpPr>
+          <p:cNvPr id="11" name="Shape 8"/>
           <p:cNvSpPr/>
           <p:nvPr/>
         </p:nvSpPr>
         <p:spPr>
           <a:xfrm>
-            <a:off x="9555480" y="1600200"/>
-            <a:ext cx="822960" cy="457200"/>
+            <a:off x="3675888" y="2093976"/>
+            <a:ext cx="411480" cy="365760"/>
           </a:xfrm>
           <a:prstGeom prst="roundRect">
             <a:avLst>
@@ -4946,14 +6180,14 @@
       </p:sp>
       <p:sp>
         <p:nvSpPr>
-          <p:cNvPr id="10" name="Text 7"/>
-          <p:cNvSpPr txBox="1"/>
-          <p:nvPr/>
-        </p:nvSpPr>
-        <p:spPr>
-          <a:xfrm>
-            <a:off x="9555480" y="1600200"/>
-            <a:ext cx="822960" cy="457200"/>
+          <p:cNvPr id="12" name="Text 9"/>
+          <p:cNvSpPr txBox="1"/>
+          <p:nvPr/>
+        </p:nvSpPr>
+        <p:spPr>
+          <a:xfrm>
+            <a:off x="3675888" y="2093976"/>
+            <a:ext cx="411480" cy="365760"/>
           </a:xfrm>
           <a:prstGeom prst="rect">
             <a:avLst/>
@@ -4969,7 +6203,7 @@
               <a:buNone/>
             </a:pPr>
             <a:r>
-              <a:rPr lang="en-US" sz="2200" b="1" dirty="0">
+              <a:rPr lang="en-US" sz="1600" b="1" dirty="0">
                 <a:solidFill>
                   <a:srgbClr val="FFFFFF"/>
                 </a:solidFill>
@@ -4979,24 +6213,24 @@
               </a:rPr>
               <a:t>a</a:t>
             </a:r>
-            <a:endParaRPr lang="en-US" sz="2200" dirty="0"/>
-          </a:p>
-        </p:txBody>
-      </p:sp>
-      <p:sp>
-        <p:nvSpPr>
-          <p:cNvPr id="11" name="Shape 8"/>
+            <a:endParaRPr lang="en-US" sz="1600" dirty="0"/>
+          </a:p>
+        </p:txBody>
+      </p:sp>
+      <p:sp>
+        <p:nvSpPr>
+          <p:cNvPr id="13" name="Shape 10"/>
           <p:cNvSpPr/>
           <p:nvPr/>
         </p:nvSpPr>
         <p:spPr>
           <a:xfrm>
-            <a:off x="548640" y="2212848"/>
-            <a:ext cx="8778240" cy="548640"/>
+            <a:off x="548640" y="2679192"/>
+            <a:ext cx="3611880" cy="621792"/>
           </a:xfrm>
           <a:prstGeom prst="roundRect">
             <a:avLst>
-              <a:gd name="adj" fmla="val 13333"/>
+              <a:gd name="adj" fmla="val 7353"/>
             </a:avLst>
           </a:prstGeom>
           <a:solidFill>
@@ -5007,30 +6241,30 @@
       </p:sp>
       <p:sp>
         <p:nvSpPr>
-          <p:cNvPr id="12" name="Text 9"/>
-          <p:cNvSpPr txBox="1"/>
-          <p:nvPr/>
-        </p:nvSpPr>
-        <p:spPr>
-          <a:xfrm>
-            <a:off x="822960" y="2304288"/>
-            <a:ext cx="8412480" cy="411480"/>
-          </a:xfrm>
-          <a:prstGeom prst="rect">
-            <a:avLst/>
-          </a:prstGeom>
-          <a:noFill/>
-          <a:ln/>
-        </p:spPr>
-        <p:txBody>
-          <a:bodyPr wrap="square" lIns="0" tIns="0" rIns="0" bIns="0" rtlCol="0" anchor="t"/>
-          <a:lstStyle/>
-          <a:p>
-            <a:pPr indent="0" marL="0">
-              <a:buNone/>
-            </a:pPr>
-            <a:r>
-              <a:rPr lang="en-US" sz="2200" dirty="0">
+          <p:cNvPr id="14" name="Text 11"/>
+          <p:cNvSpPr txBox="1"/>
+          <p:nvPr/>
+        </p:nvSpPr>
+        <p:spPr>
+          <a:xfrm>
+            <a:off x="640080" y="2752344"/>
+            <a:ext cx="2971800" cy="502920"/>
+          </a:xfrm>
+          <a:prstGeom prst="rect">
+            <a:avLst/>
+          </a:prstGeom>
+          <a:noFill/>
+          <a:ln/>
+        </p:spPr>
+        <p:txBody>
+          <a:bodyPr wrap="square" lIns="0" tIns="0" rIns="0" bIns="0" rtlCol="0" anchor="ctr"/>
+          <a:lstStyle/>
+          <a:p>
+            <a:pPr indent="0" marL="0">
+              <a:buNone/>
+            </a:pPr>
+            <a:r>
+              <a:rPr lang="en-US" sz="1250" dirty="0">
                 <a:solidFill>
                   <a:srgbClr val="1E2761"/>
                 </a:solidFill>
@@ -5038,22 +6272,22 @@
                 <a:ea typeface="Cambria" pitchFamily="34" charset="-122"/>
                 <a:cs typeface="Cambria" pitchFamily="34" charset="-120"/>
               </a:rPr>
-              <a:t>mein Gegner hält mich am Kragen,</a:t>
-            </a:r>
-            <a:endParaRPr lang="en-US" sz="2200" dirty="0"/>
-          </a:p>
-        </p:txBody>
-      </p:sp>
-      <p:sp>
-        <p:nvSpPr>
-          <p:cNvPr id="13" name="Shape 10"/>
+              <a:t>ich atme tief, ich bin bereit,</a:t>
+            </a:r>
+            <a:endParaRPr lang="en-US" sz="1250" dirty="0"/>
+          </a:p>
+        </p:txBody>
+      </p:sp>
+      <p:sp>
+        <p:nvSpPr>
+          <p:cNvPr id="15" name="Shape 12"/>
           <p:cNvSpPr/>
           <p:nvPr/>
         </p:nvSpPr>
         <p:spPr>
           <a:xfrm>
-            <a:off x="9555480" y="2258568"/>
-            <a:ext cx="822960" cy="457200"/>
+            <a:off x="3675888" y="2807208"/>
+            <a:ext cx="411480" cy="365760"/>
           </a:xfrm>
           <a:prstGeom prst="roundRect">
             <a:avLst>
@@ -5068,14 +6302,14 @@
       </p:sp>
       <p:sp>
         <p:nvSpPr>
-          <p:cNvPr id="14" name="Text 11"/>
-          <p:cNvSpPr txBox="1"/>
-          <p:nvPr/>
-        </p:nvSpPr>
-        <p:spPr>
-          <a:xfrm>
-            <a:off x="9555480" y="2258568"/>
-            <a:ext cx="822960" cy="457200"/>
+          <p:cNvPr id="16" name="Text 13"/>
+          <p:cNvSpPr txBox="1"/>
+          <p:nvPr/>
+        </p:nvSpPr>
+        <p:spPr>
+          <a:xfrm>
+            <a:off x="3675888" y="2807208"/>
+            <a:ext cx="411480" cy="365760"/>
           </a:xfrm>
           <a:prstGeom prst="rect">
             <a:avLst/>
@@ -5091,7 +6325,7 @@
               <a:buNone/>
             </a:pPr>
             <a:r>
-              <a:rPr lang="en-US" sz="2200" b="1" dirty="0">
+              <a:rPr lang="en-US" sz="1600" b="1" dirty="0">
                 <a:solidFill>
                   <a:srgbClr val="FFFFFF"/>
                 </a:solidFill>
@@ -5101,24 +6335,24 @@
               </a:rPr>
               <a:t>b</a:t>
             </a:r>
-            <a:endParaRPr lang="en-US" sz="2200" dirty="0"/>
-          </a:p>
-        </p:txBody>
-      </p:sp>
-      <p:sp>
-        <p:nvSpPr>
-          <p:cNvPr id="15" name="Shape 12"/>
+            <a:endParaRPr lang="en-US" sz="1600" dirty="0"/>
+          </a:p>
+        </p:txBody>
+      </p:sp>
+      <p:sp>
+        <p:nvSpPr>
+          <p:cNvPr id="17" name="Shape 14"/>
           <p:cNvSpPr/>
           <p:nvPr/>
         </p:nvSpPr>
         <p:spPr>
           <a:xfrm>
-            <a:off x="548640" y="2871216"/>
-            <a:ext cx="8778240" cy="548640"/>
+            <a:off x="548640" y="3392424"/>
+            <a:ext cx="3611880" cy="621792"/>
           </a:xfrm>
           <a:prstGeom prst="roundRect">
             <a:avLst>
-              <a:gd name="adj" fmla="val 13333"/>
+              <a:gd name="adj" fmla="val 7353"/>
             </a:avLst>
           </a:prstGeom>
           <a:solidFill>
@@ -5129,30 +6363,30 @@
       </p:sp>
       <p:sp>
         <p:nvSpPr>
-          <p:cNvPr id="16" name="Text 13"/>
-          <p:cNvSpPr txBox="1"/>
-          <p:nvPr/>
-        </p:nvSpPr>
-        <p:spPr>
-          <a:xfrm>
-            <a:off x="822960" y="2962656"/>
-            <a:ext cx="8412480" cy="411480"/>
-          </a:xfrm>
-          <a:prstGeom prst="rect">
-            <a:avLst/>
-          </a:prstGeom>
-          <a:noFill/>
-          <a:ln/>
-        </p:spPr>
-        <p:txBody>
-          <a:bodyPr wrap="square" lIns="0" tIns="0" rIns="0" bIns="0" rtlCol="0" anchor="t"/>
-          <a:lstStyle/>
-          <a:p>
-            <a:pPr indent="0" marL="0">
-              <a:buNone/>
-            </a:pPr>
-            <a:r>
-              <a:rPr lang="en-US" sz="2200" dirty="0">
+          <p:cNvPr id="18" name="Text 15"/>
+          <p:cNvSpPr txBox="1"/>
+          <p:nvPr/>
+        </p:nvSpPr>
+        <p:spPr>
+          <a:xfrm>
+            <a:off x="640080" y="3465576"/>
+            <a:ext cx="2971800" cy="502920"/>
+          </a:xfrm>
+          <a:prstGeom prst="rect">
+            <a:avLst/>
+          </a:prstGeom>
+          <a:noFill/>
+          <a:ln/>
+        </p:spPr>
+        <p:txBody>
+          <a:bodyPr wrap="square" lIns="0" tIns="0" rIns="0" bIns="0" rtlCol="0" anchor="ctr"/>
+          <a:lstStyle/>
+          <a:p>
+            <a:pPr indent="0" marL="0">
+              <a:buNone/>
+            </a:pPr>
+            <a:r>
+              <a:rPr lang="en-US" sz="1250" dirty="0">
                 <a:solidFill>
                   <a:srgbClr val="1E2761"/>
                 </a:solidFill>
@@ -5160,22 +6394,22 @@
                 <a:ea typeface="Cambria" pitchFamily="34" charset="-122"/>
                 <a:cs typeface="Cambria" pitchFamily="34" charset="-120"/>
               </a:rPr>
-              <a:t>ich muss jetzt alles wagen –</a:t>
-            </a:r>
-            <a:endParaRPr lang="en-US" sz="2200" dirty="0"/>
-          </a:p>
-        </p:txBody>
-      </p:sp>
-      <p:sp>
-        <p:nvSpPr>
-          <p:cNvPr id="17" name="Shape 14"/>
+              <a:t>der Trainer nickt, jetzt ist es Zeit –</a:t>
+            </a:r>
+            <a:endParaRPr lang="en-US" sz="1250" dirty="0"/>
+          </a:p>
+        </p:txBody>
+      </p:sp>
+      <p:sp>
+        <p:nvSpPr>
+          <p:cNvPr id="19" name="Shape 16"/>
           <p:cNvSpPr/>
           <p:nvPr/>
         </p:nvSpPr>
         <p:spPr>
           <a:xfrm>
-            <a:off x="9555480" y="2916936"/>
-            <a:ext cx="822960" cy="457200"/>
+            <a:off x="3675888" y="3520440"/>
+            <a:ext cx="411480" cy="365760"/>
           </a:xfrm>
           <a:prstGeom prst="roundRect">
             <a:avLst>
@@ -5190,14 +6424,14 @@
       </p:sp>
       <p:sp>
         <p:nvSpPr>
-          <p:cNvPr id="18" name="Text 15"/>
-          <p:cNvSpPr txBox="1"/>
-          <p:nvPr/>
-        </p:nvSpPr>
-        <p:spPr>
-          <a:xfrm>
-            <a:off x="9555480" y="2916936"/>
-            <a:ext cx="822960" cy="457200"/>
+          <p:cNvPr id="20" name="Text 17"/>
+          <p:cNvSpPr txBox="1"/>
+          <p:nvPr/>
+        </p:nvSpPr>
+        <p:spPr>
+          <a:xfrm>
+            <a:off x="3675888" y="3520440"/>
+            <a:ext cx="411480" cy="365760"/>
           </a:xfrm>
           <a:prstGeom prst="rect">
             <a:avLst/>
@@ -5213,7 +6447,7 @@
               <a:buNone/>
             </a:pPr>
             <a:r>
-              <a:rPr lang="en-US" sz="2200" b="1" dirty="0">
+              <a:rPr lang="en-US" sz="1600" b="1" dirty="0">
                 <a:solidFill>
                   <a:srgbClr val="FFFFFF"/>
                 </a:solidFill>
@@ -5223,24 +6457,24 @@
               </a:rPr>
               <a:t>b</a:t>
             </a:r>
-            <a:endParaRPr lang="en-US" sz="2200" dirty="0"/>
-          </a:p>
-        </p:txBody>
-      </p:sp>
-      <p:sp>
-        <p:nvSpPr>
-          <p:cNvPr id="19" name="Shape 16"/>
+            <a:endParaRPr lang="en-US" sz="1600" dirty="0"/>
+          </a:p>
+        </p:txBody>
+      </p:sp>
+      <p:sp>
+        <p:nvSpPr>
+          <p:cNvPr id="21" name="Shape 18"/>
           <p:cNvSpPr/>
           <p:nvPr/>
         </p:nvSpPr>
         <p:spPr>
           <a:xfrm>
-            <a:off x="548640" y="3529584"/>
-            <a:ext cx="8778240" cy="548640"/>
+            <a:off x="548640" y="4105656"/>
+            <a:ext cx="3611880" cy="621792"/>
           </a:xfrm>
           <a:prstGeom prst="roundRect">
             <a:avLst>
-              <a:gd name="adj" fmla="val 13333"/>
+              <a:gd name="adj" fmla="val 7353"/>
             </a:avLst>
           </a:prstGeom>
           <a:solidFill>
@@ -5251,30 +6485,30 @@
       </p:sp>
       <p:sp>
         <p:nvSpPr>
-          <p:cNvPr id="20" name="Text 17"/>
-          <p:cNvSpPr txBox="1"/>
-          <p:nvPr/>
-        </p:nvSpPr>
-        <p:spPr>
-          <a:xfrm>
-            <a:off x="822960" y="3621024"/>
-            <a:ext cx="8412480" cy="411480"/>
-          </a:xfrm>
-          <a:prstGeom prst="rect">
-            <a:avLst/>
-          </a:prstGeom>
-          <a:noFill/>
-          <a:ln/>
-        </p:spPr>
-        <p:txBody>
-          <a:bodyPr wrap="square" lIns="0" tIns="0" rIns="0" bIns="0" rtlCol="0" anchor="t"/>
-          <a:lstStyle/>
-          <a:p>
-            <a:pPr indent="0" marL="0">
-              <a:buNone/>
-            </a:pPr>
-            <a:r>
-              <a:rPr lang="en-US" sz="2200" dirty="0">
+          <p:cNvPr id="22" name="Text 19"/>
+          <p:cNvSpPr txBox="1"/>
+          <p:nvPr/>
+        </p:nvSpPr>
+        <p:spPr>
+          <a:xfrm>
+            <a:off x="640080" y="4178808"/>
+            <a:ext cx="2971800" cy="502920"/>
+          </a:xfrm>
+          <a:prstGeom prst="rect">
+            <a:avLst/>
+          </a:prstGeom>
+          <a:noFill/>
+          <a:ln/>
+        </p:spPr>
+        <p:txBody>
+          <a:bodyPr wrap="square" lIns="0" tIns="0" rIns="0" bIns="0" rtlCol="0" anchor="ctr"/>
+          <a:lstStyle/>
+          <a:p>
+            <a:pPr indent="0" marL="0">
+              <a:buNone/>
+            </a:pPr>
+            <a:r>
+              <a:rPr lang="en-US" sz="1250" dirty="0">
                 <a:solidFill>
                   <a:srgbClr val="1E2761"/>
                 </a:solidFill>
@@ -5282,22 +6516,22 @@
                 <a:ea typeface="Cambria" pitchFamily="34" charset="-122"/>
                 <a:cs typeface="Cambria" pitchFamily="34" charset="-120"/>
               </a:rPr>
-              <a:t>ein Wurf, und dann ist Ruh.</a:t>
-            </a:r>
-            <a:endParaRPr lang="en-US" sz="2200" dirty="0"/>
-          </a:p>
-        </p:txBody>
-      </p:sp>
-      <p:sp>
-        <p:nvSpPr>
-          <p:cNvPr id="21" name="Shape 18"/>
+              <a:t>die Stange über meinem Kopf, sie steigt.</a:t>
+            </a:r>
+            <a:endParaRPr lang="en-US" sz="1250" dirty="0"/>
+          </a:p>
+        </p:txBody>
+      </p:sp>
+      <p:sp>
+        <p:nvSpPr>
+          <p:cNvPr id="23" name="Shape 20"/>
           <p:cNvSpPr/>
           <p:nvPr/>
         </p:nvSpPr>
         <p:spPr>
           <a:xfrm>
-            <a:off x="9555480" y="3575304"/>
-            <a:ext cx="822960" cy="457200"/>
+            <a:off x="3675888" y="4233672"/>
+            <a:ext cx="411480" cy="365760"/>
           </a:xfrm>
           <a:prstGeom prst="roundRect">
             <a:avLst>
@@ -5312,14 +6546,14 @@
       </p:sp>
       <p:sp>
         <p:nvSpPr>
-          <p:cNvPr id="22" name="Text 19"/>
-          <p:cNvSpPr txBox="1"/>
-          <p:nvPr/>
-        </p:nvSpPr>
-        <p:spPr>
-          <a:xfrm>
-            <a:off x="9555480" y="3575304"/>
-            <a:ext cx="822960" cy="457200"/>
+          <p:cNvPr id="24" name="Text 21"/>
+          <p:cNvSpPr txBox="1"/>
+          <p:nvPr/>
+        </p:nvSpPr>
+        <p:spPr>
+          <a:xfrm>
+            <a:off x="3675888" y="4233672"/>
+            <a:ext cx="411480" cy="365760"/>
           </a:xfrm>
           <a:prstGeom prst="rect">
             <a:avLst/>
@@ -5335,7 +6569,7 @@
               <a:buNone/>
             </a:pPr>
             <a:r>
-              <a:rPr lang="en-US" sz="2200" b="1" dirty="0">
+              <a:rPr lang="en-US" sz="1600" b="1" dirty="0">
                 <a:solidFill>
                   <a:srgbClr val="FFFFFF"/>
                 </a:solidFill>
@@ -5345,19 +6579,1117 @@
               </a:rPr>
               <a:t>a</a:t>
             </a:r>
-            <a:endParaRPr lang="en-US" sz="2200" dirty="0"/>
-          </a:p>
-        </p:txBody>
-      </p:sp>
-      <p:sp>
-        <p:nvSpPr>
-          <p:cNvPr id="23" name="Shape 20"/>
+            <a:endParaRPr lang="en-US" sz="1600" dirty="0"/>
+          </a:p>
+        </p:txBody>
+      </p:sp>
+      <p:sp>
+        <p:nvSpPr>
+          <p:cNvPr id="25" name="Shape 22"/>
           <p:cNvSpPr/>
           <p:nvPr/>
         </p:nvSpPr>
         <p:spPr>
           <a:xfrm>
-            <a:off x="548640" y="5074920"/>
+            <a:off x="4297680" y="1417320"/>
+            <a:ext cx="3611880" cy="411480"/>
+          </a:xfrm>
+          <a:prstGeom prst="roundRect">
+            <a:avLst>
+              <a:gd name="adj" fmla="val 11111"/>
+            </a:avLst>
+          </a:prstGeom>
+          <a:solidFill>
+            <a:srgbClr val="1E2761"/>
+          </a:solidFill>
+          <a:ln/>
+        </p:spPr>
+      </p:sp>
+      <p:sp>
+        <p:nvSpPr>
+          <p:cNvPr id="26" name="Text 23"/>
+          <p:cNvSpPr txBox="1"/>
+          <p:nvPr/>
+        </p:nvSpPr>
+        <p:spPr>
+          <a:xfrm>
+            <a:off x="4297680" y="1417320"/>
+            <a:ext cx="3611880" cy="411480"/>
+          </a:xfrm>
+          <a:prstGeom prst="rect">
+            <a:avLst/>
+          </a:prstGeom>
+          <a:noFill/>
+          <a:ln/>
+        </p:spPr>
+        <p:txBody>
+          <a:bodyPr wrap="square" lIns="0" tIns="0" rIns="0" bIns="0" rtlCol="0" anchor="ctr"/>
+          <a:lstStyle/>
+          <a:p>
+            <a:pPr algn="ctr" indent="0" marL="0">
+              <a:buNone/>
+            </a:pPr>
+            <a:r>
+              <a:rPr lang="en-US" sz="1500" b="1" dirty="0">
+                <a:solidFill>
+                  <a:srgbClr val="FFFFFF"/>
+                </a:solidFill>
+                <a:latin typeface="Calibri" pitchFamily="34" charset="0"/>
+                <a:ea typeface="Calibri" pitchFamily="34" charset="-122"/>
+                <a:cs typeface="Calibri" pitchFamily="34" charset="-120"/>
+              </a:rPr>
+              <a:t>Judo</a:t>
+            </a:r>
+            <a:endParaRPr lang="en-US" sz="1500" dirty="0"/>
+          </a:p>
+        </p:txBody>
+      </p:sp>
+      <p:sp>
+        <p:nvSpPr>
+          <p:cNvPr id="27" name="Shape 24"/>
+          <p:cNvSpPr/>
+          <p:nvPr/>
+        </p:nvSpPr>
+        <p:spPr>
+          <a:xfrm>
+            <a:off x="4297680" y="1965960"/>
+            <a:ext cx="3611880" cy="621792"/>
+          </a:xfrm>
+          <a:prstGeom prst="roundRect">
+            <a:avLst>
+              <a:gd name="adj" fmla="val 7353"/>
+            </a:avLst>
+          </a:prstGeom>
+          <a:solidFill>
+            <a:srgbClr val="F4F7FD"/>
+          </a:solidFill>
+          <a:ln/>
+        </p:spPr>
+      </p:sp>
+      <p:sp>
+        <p:nvSpPr>
+          <p:cNvPr id="28" name="Text 25"/>
+          <p:cNvSpPr txBox="1"/>
+          <p:nvPr/>
+        </p:nvSpPr>
+        <p:spPr>
+          <a:xfrm>
+            <a:off x="4389120" y="2039112"/>
+            <a:ext cx="2971800" cy="502920"/>
+          </a:xfrm>
+          <a:prstGeom prst="rect">
+            <a:avLst/>
+          </a:prstGeom>
+          <a:noFill/>
+          <a:ln/>
+        </p:spPr>
+        <p:txBody>
+          <a:bodyPr wrap="square" lIns="0" tIns="0" rIns="0" bIns="0" rtlCol="0" anchor="ctr"/>
+          <a:lstStyle/>
+          <a:p>
+            <a:pPr indent="0" marL="0">
+              <a:buNone/>
+            </a:pPr>
+            <a:r>
+              <a:rPr lang="en-US" sz="1250" dirty="0">
+                <a:solidFill>
+                  <a:srgbClr val="1E2761"/>
+                </a:solidFill>
+                <a:latin typeface="Cambria" pitchFamily="34" charset="0"/>
+                <a:ea typeface="Cambria" pitchFamily="34" charset="-122"/>
+                <a:cs typeface="Cambria" pitchFamily="34" charset="-120"/>
+              </a:rPr>
+              <a:t>Der Kampf beginnt, ich greife zu,</a:t>
+            </a:r>
+            <a:endParaRPr lang="en-US" sz="1250" dirty="0"/>
+          </a:p>
+        </p:txBody>
+      </p:sp>
+      <p:sp>
+        <p:nvSpPr>
+          <p:cNvPr id="29" name="Shape 26"/>
+          <p:cNvSpPr/>
+          <p:nvPr/>
+        </p:nvSpPr>
+        <p:spPr>
+          <a:xfrm>
+            <a:off x="7424928" y="2093976"/>
+            <a:ext cx="411480" cy="365760"/>
+          </a:xfrm>
+          <a:prstGeom prst="roundRect">
+            <a:avLst>
+              <a:gd name="adj" fmla="val 50000"/>
+            </a:avLst>
+          </a:prstGeom>
+          <a:solidFill>
+            <a:srgbClr val="2A8C8C"/>
+          </a:solidFill>
+          <a:ln/>
+        </p:spPr>
+      </p:sp>
+      <p:sp>
+        <p:nvSpPr>
+          <p:cNvPr id="30" name="Text 27"/>
+          <p:cNvSpPr txBox="1"/>
+          <p:nvPr/>
+        </p:nvSpPr>
+        <p:spPr>
+          <a:xfrm>
+            <a:off x="7424928" y="2093976"/>
+            <a:ext cx="411480" cy="365760"/>
+          </a:xfrm>
+          <a:prstGeom prst="rect">
+            <a:avLst/>
+          </a:prstGeom>
+          <a:noFill/>
+          <a:ln/>
+        </p:spPr>
+        <p:txBody>
+          <a:bodyPr wrap="square" lIns="0" tIns="0" rIns="0" bIns="0" rtlCol="0" anchor="ctr"/>
+          <a:lstStyle/>
+          <a:p>
+            <a:pPr algn="ctr" indent="0" marL="0">
+              <a:buNone/>
+            </a:pPr>
+            <a:r>
+              <a:rPr lang="en-US" sz="1600" b="1" dirty="0">
+                <a:solidFill>
+                  <a:srgbClr val="FFFFFF"/>
+                </a:solidFill>
+                <a:latin typeface="Calibri" pitchFamily="34" charset="0"/>
+                <a:ea typeface="Calibri" pitchFamily="34" charset="-122"/>
+                <a:cs typeface="Calibri" pitchFamily="34" charset="-120"/>
+              </a:rPr>
+              <a:t>a</a:t>
+            </a:r>
+            <a:endParaRPr lang="en-US" sz="1600" dirty="0"/>
+          </a:p>
+        </p:txBody>
+      </p:sp>
+      <p:sp>
+        <p:nvSpPr>
+          <p:cNvPr id="31" name="Shape 28"/>
+          <p:cNvSpPr/>
+          <p:nvPr/>
+        </p:nvSpPr>
+        <p:spPr>
+          <a:xfrm>
+            <a:off x="4297680" y="2679192"/>
+            <a:ext cx="3611880" cy="621792"/>
+          </a:xfrm>
+          <a:prstGeom prst="roundRect">
+            <a:avLst>
+              <a:gd name="adj" fmla="val 7353"/>
+            </a:avLst>
+          </a:prstGeom>
+          <a:solidFill>
+            <a:srgbClr val="F4F7FD"/>
+          </a:solidFill>
+          <a:ln/>
+        </p:spPr>
+      </p:sp>
+      <p:sp>
+        <p:nvSpPr>
+          <p:cNvPr id="32" name="Text 29"/>
+          <p:cNvSpPr txBox="1"/>
+          <p:nvPr/>
+        </p:nvSpPr>
+        <p:spPr>
+          <a:xfrm>
+            <a:off x="4389120" y="2752344"/>
+            <a:ext cx="2971800" cy="502920"/>
+          </a:xfrm>
+          <a:prstGeom prst="rect">
+            <a:avLst/>
+          </a:prstGeom>
+          <a:noFill/>
+          <a:ln/>
+        </p:spPr>
+        <p:txBody>
+          <a:bodyPr wrap="square" lIns="0" tIns="0" rIns="0" bIns="0" rtlCol="0" anchor="ctr"/>
+          <a:lstStyle/>
+          <a:p>
+            <a:pPr indent="0" marL="0">
+              <a:buNone/>
+            </a:pPr>
+            <a:r>
+              <a:rPr lang="en-US" sz="1250" dirty="0">
+                <a:solidFill>
+                  <a:srgbClr val="1E2761"/>
+                </a:solidFill>
+                <a:latin typeface="Cambria" pitchFamily="34" charset="0"/>
+                <a:ea typeface="Cambria" pitchFamily="34" charset="-122"/>
+                <a:cs typeface="Cambria" pitchFamily="34" charset="-120"/>
+              </a:rPr>
+              <a:t>mein Gegner hält mich am Kragen,</a:t>
+            </a:r>
+            <a:endParaRPr lang="en-US" sz="1250" dirty="0"/>
+          </a:p>
+        </p:txBody>
+      </p:sp>
+      <p:sp>
+        <p:nvSpPr>
+          <p:cNvPr id="33" name="Shape 30"/>
+          <p:cNvSpPr/>
+          <p:nvPr/>
+        </p:nvSpPr>
+        <p:spPr>
+          <a:xfrm>
+            <a:off x="7424928" y="2807208"/>
+            <a:ext cx="411480" cy="365760"/>
+          </a:xfrm>
+          <a:prstGeom prst="roundRect">
+            <a:avLst>
+              <a:gd name="adj" fmla="val 50000"/>
+            </a:avLst>
+          </a:prstGeom>
+          <a:solidFill>
+            <a:srgbClr val="C77C12"/>
+          </a:solidFill>
+          <a:ln/>
+        </p:spPr>
+      </p:sp>
+      <p:sp>
+        <p:nvSpPr>
+          <p:cNvPr id="34" name="Text 31"/>
+          <p:cNvSpPr txBox="1"/>
+          <p:nvPr/>
+        </p:nvSpPr>
+        <p:spPr>
+          <a:xfrm>
+            <a:off x="7424928" y="2807208"/>
+            <a:ext cx="411480" cy="365760"/>
+          </a:xfrm>
+          <a:prstGeom prst="rect">
+            <a:avLst/>
+          </a:prstGeom>
+          <a:noFill/>
+          <a:ln/>
+        </p:spPr>
+        <p:txBody>
+          <a:bodyPr wrap="square" lIns="0" tIns="0" rIns="0" bIns="0" rtlCol="0" anchor="ctr"/>
+          <a:lstStyle/>
+          <a:p>
+            <a:pPr algn="ctr" indent="0" marL="0">
+              <a:buNone/>
+            </a:pPr>
+            <a:r>
+              <a:rPr lang="en-US" sz="1600" b="1" dirty="0">
+                <a:solidFill>
+                  <a:srgbClr val="FFFFFF"/>
+                </a:solidFill>
+                <a:latin typeface="Calibri" pitchFamily="34" charset="0"/>
+                <a:ea typeface="Calibri" pitchFamily="34" charset="-122"/>
+                <a:cs typeface="Calibri" pitchFamily="34" charset="-120"/>
+              </a:rPr>
+              <a:t>b</a:t>
+            </a:r>
+            <a:endParaRPr lang="en-US" sz="1600" dirty="0"/>
+          </a:p>
+        </p:txBody>
+      </p:sp>
+      <p:sp>
+        <p:nvSpPr>
+          <p:cNvPr id="35" name="Shape 32"/>
+          <p:cNvSpPr/>
+          <p:nvPr/>
+        </p:nvSpPr>
+        <p:spPr>
+          <a:xfrm>
+            <a:off x="4297680" y="3392424"/>
+            <a:ext cx="3611880" cy="621792"/>
+          </a:xfrm>
+          <a:prstGeom prst="roundRect">
+            <a:avLst>
+              <a:gd name="adj" fmla="val 7353"/>
+            </a:avLst>
+          </a:prstGeom>
+          <a:solidFill>
+            <a:srgbClr val="F4F7FD"/>
+          </a:solidFill>
+          <a:ln/>
+        </p:spPr>
+      </p:sp>
+      <p:sp>
+        <p:nvSpPr>
+          <p:cNvPr id="36" name="Text 33"/>
+          <p:cNvSpPr txBox="1"/>
+          <p:nvPr/>
+        </p:nvSpPr>
+        <p:spPr>
+          <a:xfrm>
+            <a:off x="4389120" y="3465576"/>
+            <a:ext cx="2971800" cy="502920"/>
+          </a:xfrm>
+          <a:prstGeom prst="rect">
+            <a:avLst/>
+          </a:prstGeom>
+          <a:noFill/>
+          <a:ln/>
+        </p:spPr>
+        <p:txBody>
+          <a:bodyPr wrap="square" lIns="0" tIns="0" rIns="0" bIns="0" rtlCol="0" anchor="ctr"/>
+          <a:lstStyle/>
+          <a:p>
+            <a:pPr indent="0" marL="0">
+              <a:buNone/>
+            </a:pPr>
+            <a:r>
+              <a:rPr lang="en-US" sz="1250" dirty="0">
+                <a:solidFill>
+                  <a:srgbClr val="1E2761"/>
+                </a:solidFill>
+                <a:latin typeface="Cambria" pitchFamily="34" charset="0"/>
+                <a:ea typeface="Cambria" pitchFamily="34" charset="-122"/>
+                <a:cs typeface="Cambria" pitchFamily="34" charset="-120"/>
+              </a:rPr>
+              <a:t>ich muss jetzt alles wagen –</a:t>
+            </a:r>
+            <a:endParaRPr lang="en-US" sz="1250" dirty="0"/>
+          </a:p>
+        </p:txBody>
+      </p:sp>
+      <p:sp>
+        <p:nvSpPr>
+          <p:cNvPr id="37" name="Shape 34"/>
+          <p:cNvSpPr/>
+          <p:nvPr/>
+        </p:nvSpPr>
+        <p:spPr>
+          <a:xfrm>
+            <a:off x="7424928" y="3520440"/>
+            <a:ext cx="411480" cy="365760"/>
+          </a:xfrm>
+          <a:prstGeom prst="roundRect">
+            <a:avLst>
+              <a:gd name="adj" fmla="val 50000"/>
+            </a:avLst>
+          </a:prstGeom>
+          <a:solidFill>
+            <a:srgbClr val="C77C12"/>
+          </a:solidFill>
+          <a:ln/>
+        </p:spPr>
+      </p:sp>
+      <p:sp>
+        <p:nvSpPr>
+          <p:cNvPr id="38" name="Text 35"/>
+          <p:cNvSpPr txBox="1"/>
+          <p:nvPr/>
+        </p:nvSpPr>
+        <p:spPr>
+          <a:xfrm>
+            <a:off x="7424928" y="3520440"/>
+            <a:ext cx="411480" cy="365760"/>
+          </a:xfrm>
+          <a:prstGeom prst="rect">
+            <a:avLst/>
+          </a:prstGeom>
+          <a:noFill/>
+          <a:ln/>
+        </p:spPr>
+        <p:txBody>
+          <a:bodyPr wrap="square" lIns="0" tIns="0" rIns="0" bIns="0" rtlCol="0" anchor="ctr"/>
+          <a:lstStyle/>
+          <a:p>
+            <a:pPr algn="ctr" indent="0" marL="0">
+              <a:buNone/>
+            </a:pPr>
+            <a:r>
+              <a:rPr lang="en-US" sz="1600" b="1" dirty="0">
+                <a:solidFill>
+                  <a:srgbClr val="FFFFFF"/>
+                </a:solidFill>
+                <a:latin typeface="Calibri" pitchFamily="34" charset="0"/>
+                <a:ea typeface="Calibri" pitchFamily="34" charset="-122"/>
+                <a:cs typeface="Calibri" pitchFamily="34" charset="-120"/>
+              </a:rPr>
+              <a:t>b</a:t>
+            </a:r>
+            <a:endParaRPr lang="en-US" sz="1600" dirty="0"/>
+          </a:p>
+        </p:txBody>
+      </p:sp>
+      <p:sp>
+        <p:nvSpPr>
+          <p:cNvPr id="39" name="Shape 36"/>
+          <p:cNvSpPr/>
+          <p:nvPr/>
+        </p:nvSpPr>
+        <p:spPr>
+          <a:xfrm>
+            <a:off x="4297680" y="4105656"/>
+            <a:ext cx="3611880" cy="621792"/>
+          </a:xfrm>
+          <a:prstGeom prst="roundRect">
+            <a:avLst>
+              <a:gd name="adj" fmla="val 7353"/>
+            </a:avLst>
+          </a:prstGeom>
+          <a:solidFill>
+            <a:srgbClr val="F4F7FD"/>
+          </a:solidFill>
+          <a:ln/>
+        </p:spPr>
+      </p:sp>
+      <p:sp>
+        <p:nvSpPr>
+          <p:cNvPr id="40" name="Text 37"/>
+          <p:cNvSpPr txBox="1"/>
+          <p:nvPr/>
+        </p:nvSpPr>
+        <p:spPr>
+          <a:xfrm>
+            <a:off x="4389120" y="4178808"/>
+            <a:ext cx="2971800" cy="502920"/>
+          </a:xfrm>
+          <a:prstGeom prst="rect">
+            <a:avLst/>
+          </a:prstGeom>
+          <a:noFill/>
+          <a:ln/>
+        </p:spPr>
+        <p:txBody>
+          <a:bodyPr wrap="square" lIns="0" tIns="0" rIns="0" bIns="0" rtlCol="0" anchor="ctr"/>
+          <a:lstStyle/>
+          <a:p>
+            <a:pPr indent="0" marL="0">
+              <a:buNone/>
+            </a:pPr>
+            <a:r>
+              <a:rPr lang="en-US" sz="1250" dirty="0">
+                <a:solidFill>
+                  <a:srgbClr val="1E2761"/>
+                </a:solidFill>
+                <a:latin typeface="Cambria" pitchFamily="34" charset="0"/>
+                <a:ea typeface="Cambria" pitchFamily="34" charset="-122"/>
+                <a:cs typeface="Cambria" pitchFamily="34" charset="-120"/>
+              </a:rPr>
+              <a:t>ein Wurf, und dann ist Ruh.</a:t>
+            </a:r>
+            <a:endParaRPr lang="en-US" sz="1250" dirty="0"/>
+          </a:p>
+        </p:txBody>
+      </p:sp>
+      <p:sp>
+        <p:nvSpPr>
+          <p:cNvPr id="41" name="Shape 38"/>
+          <p:cNvSpPr/>
+          <p:nvPr/>
+        </p:nvSpPr>
+        <p:spPr>
+          <a:xfrm>
+            <a:off x="7424928" y="4233672"/>
+            <a:ext cx="411480" cy="365760"/>
+          </a:xfrm>
+          <a:prstGeom prst="roundRect">
+            <a:avLst>
+              <a:gd name="adj" fmla="val 50000"/>
+            </a:avLst>
+          </a:prstGeom>
+          <a:solidFill>
+            <a:srgbClr val="2A8C8C"/>
+          </a:solidFill>
+          <a:ln/>
+        </p:spPr>
+      </p:sp>
+      <p:sp>
+        <p:nvSpPr>
+          <p:cNvPr id="42" name="Text 39"/>
+          <p:cNvSpPr txBox="1"/>
+          <p:nvPr/>
+        </p:nvSpPr>
+        <p:spPr>
+          <a:xfrm>
+            <a:off x="7424928" y="4233672"/>
+            <a:ext cx="411480" cy="365760"/>
+          </a:xfrm>
+          <a:prstGeom prst="rect">
+            <a:avLst/>
+          </a:prstGeom>
+          <a:noFill/>
+          <a:ln/>
+        </p:spPr>
+        <p:txBody>
+          <a:bodyPr wrap="square" lIns="0" tIns="0" rIns="0" bIns="0" rtlCol="0" anchor="ctr"/>
+          <a:lstStyle/>
+          <a:p>
+            <a:pPr algn="ctr" indent="0" marL="0">
+              <a:buNone/>
+            </a:pPr>
+            <a:r>
+              <a:rPr lang="en-US" sz="1600" b="1" dirty="0">
+                <a:solidFill>
+                  <a:srgbClr val="FFFFFF"/>
+                </a:solidFill>
+                <a:latin typeface="Calibri" pitchFamily="34" charset="0"/>
+                <a:ea typeface="Calibri" pitchFamily="34" charset="-122"/>
+                <a:cs typeface="Calibri" pitchFamily="34" charset="-120"/>
+              </a:rPr>
+              <a:t>a</a:t>
+            </a:r>
+            <a:endParaRPr lang="en-US" sz="1600" dirty="0"/>
+          </a:p>
+        </p:txBody>
+      </p:sp>
+      <p:sp>
+        <p:nvSpPr>
+          <p:cNvPr id="43" name="Shape 40"/>
+          <p:cNvSpPr/>
+          <p:nvPr/>
+        </p:nvSpPr>
+        <p:spPr>
+          <a:xfrm>
+            <a:off x="8046720" y="1417320"/>
+            <a:ext cx="3611880" cy="411480"/>
+          </a:xfrm>
+          <a:prstGeom prst="roundRect">
+            <a:avLst>
+              <a:gd name="adj" fmla="val 11111"/>
+            </a:avLst>
+          </a:prstGeom>
+          <a:solidFill>
+            <a:srgbClr val="1E2761"/>
+          </a:solidFill>
+          <a:ln/>
+        </p:spPr>
+      </p:sp>
+      <p:sp>
+        <p:nvSpPr>
+          <p:cNvPr id="44" name="Text 41"/>
+          <p:cNvSpPr txBox="1"/>
+          <p:nvPr/>
+        </p:nvSpPr>
+        <p:spPr>
+          <a:xfrm>
+            <a:off x="8046720" y="1417320"/>
+            <a:ext cx="3611880" cy="411480"/>
+          </a:xfrm>
+          <a:prstGeom prst="rect">
+            <a:avLst/>
+          </a:prstGeom>
+          <a:noFill/>
+          <a:ln/>
+        </p:spPr>
+        <p:txBody>
+          <a:bodyPr wrap="square" lIns="0" tIns="0" rIns="0" bIns="0" rtlCol="0" anchor="ctr"/>
+          <a:lstStyle/>
+          <a:p>
+            <a:pPr algn="ctr" indent="0" marL="0">
+              <a:buNone/>
+            </a:pPr>
+            <a:r>
+              <a:rPr lang="en-US" sz="1500" b="1" dirty="0">
+                <a:solidFill>
+                  <a:srgbClr val="FFFFFF"/>
+                </a:solidFill>
+                <a:latin typeface="Calibri" pitchFamily="34" charset="0"/>
+                <a:ea typeface="Calibri" pitchFamily="34" charset="-122"/>
+                <a:cs typeface="Calibri" pitchFamily="34" charset="-120"/>
+              </a:rPr>
+              <a:t>Handball</a:t>
+            </a:r>
+            <a:endParaRPr lang="en-US" sz="1500" dirty="0"/>
+          </a:p>
+        </p:txBody>
+      </p:sp>
+      <p:sp>
+        <p:nvSpPr>
+          <p:cNvPr id="45" name="Shape 42"/>
+          <p:cNvSpPr/>
+          <p:nvPr/>
+        </p:nvSpPr>
+        <p:spPr>
+          <a:xfrm>
+            <a:off x="8046720" y="1965960"/>
+            <a:ext cx="3611880" cy="621792"/>
+          </a:xfrm>
+          <a:prstGeom prst="roundRect">
+            <a:avLst>
+              <a:gd name="adj" fmla="val 7353"/>
+            </a:avLst>
+          </a:prstGeom>
+          <a:solidFill>
+            <a:srgbClr val="F4F7FD"/>
+          </a:solidFill>
+          <a:ln/>
+        </p:spPr>
+      </p:sp>
+      <p:sp>
+        <p:nvSpPr>
+          <p:cNvPr id="46" name="Text 43"/>
+          <p:cNvSpPr txBox="1"/>
+          <p:nvPr/>
+        </p:nvSpPr>
+        <p:spPr>
+          <a:xfrm>
+            <a:off x="8138160" y="2039112"/>
+            <a:ext cx="2971800" cy="502920"/>
+          </a:xfrm>
+          <a:prstGeom prst="rect">
+            <a:avLst/>
+          </a:prstGeom>
+          <a:noFill/>
+          <a:ln/>
+        </p:spPr>
+        <p:txBody>
+          <a:bodyPr wrap="square" lIns="0" tIns="0" rIns="0" bIns="0" rtlCol="0" anchor="ctr"/>
+          <a:lstStyle/>
+          <a:p>
+            <a:pPr indent="0" marL="0">
+              <a:buNone/>
+            </a:pPr>
+            <a:r>
+              <a:rPr lang="en-US" sz="1250" dirty="0">
+                <a:solidFill>
+                  <a:srgbClr val="1E2761"/>
+                </a:solidFill>
+                <a:latin typeface="Cambria" pitchFamily="34" charset="0"/>
+                <a:ea typeface="Cambria" pitchFamily="34" charset="-122"/>
+                <a:cs typeface="Cambria" pitchFamily="34" charset="-120"/>
+              </a:rPr>
+              <a:t>Die Halle bebt beim letzten Spiel,</a:t>
+            </a:r>
+            <a:endParaRPr lang="en-US" sz="1250" dirty="0"/>
+          </a:p>
+        </p:txBody>
+      </p:sp>
+      <p:sp>
+        <p:nvSpPr>
+          <p:cNvPr id="47" name="Shape 44"/>
+          <p:cNvSpPr/>
+          <p:nvPr/>
+        </p:nvSpPr>
+        <p:spPr>
+          <a:xfrm>
+            <a:off x="11173968" y="2093976"/>
+            <a:ext cx="411480" cy="365760"/>
+          </a:xfrm>
+          <a:prstGeom prst="roundRect">
+            <a:avLst>
+              <a:gd name="adj" fmla="val 50000"/>
+            </a:avLst>
+          </a:prstGeom>
+          <a:solidFill>
+            <a:srgbClr val="2A8C8C"/>
+          </a:solidFill>
+          <a:ln/>
+        </p:spPr>
+      </p:sp>
+      <p:sp>
+        <p:nvSpPr>
+          <p:cNvPr id="48" name="Text 45"/>
+          <p:cNvSpPr txBox="1"/>
+          <p:nvPr/>
+        </p:nvSpPr>
+        <p:spPr>
+          <a:xfrm>
+            <a:off x="11173968" y="2093976"/>
+            <a:ext cx="411480" cy="365760"/>
+          </a:xfrm>
+          <a:prstGeom prst="rect">
+            <a:avLst/>
+          </a:prstGeom>
+          <a:noFill/>
+          <a:ln/>
+        </p:spPr>
+        <p:txBody>
+          <a:bodyPr wrap="square" lIns="0" tIns="0" rIns="0" bIns="0" rtlCol="0" anchor="ctr"/>
+          <a:lstStyle/>
+          <a:p>
+            <a:pPr algn="ctr" indent="0" marL="0">
+              <a:buNone/>
+            </a:pPr>
+            <a:r>
+              <a:rPr lang="en-US" sz="1600" b="1" dirty="0">
+                <a:solidFill>
+                  <a:srgbClr val="FFFFFF"/>
+                </a:solidFill>
+                <a:latin typeface="Calibri" pitchFamily="34" charset="0"/>
+                <a:ea typeface="Calibri" pitchFamily="34" charset="-122"/>
+                <a:cs typeface="Calibri" pitchFamily="34" charset="-120"/>
+              </a:rPr>
+              <a:t>a</a:t>
+            </a:r>
+            <a:endParaRPr lang="en-US" sz="1600" dirty="0"/>
+          </a:p>
+        </p:txBody>
+      </p:sp>
+      <p:sp>
+        <p:nvSpPr>
+          <p:cNvPr id="49" name="Shape 46"/>
+          <p:cNvSpPr/>
+          <p:nvPr/>
+        </p:nvSpPr>
+        <p:spPr>
+          <a:xfrm>
+            <a:off x="8046720" y="2679192"/>
+            <a:ext cx="3611880" cy="621792"/>
+          </a:xfrm>
+          <a:prstGeom prst="roundRect">
+            <a:avLst>
+              <a:gd name="adj" fmla="val 7353"/>
+            </a:avLst>
+          </a:prstGeom>
+          <a:solidFill>
+            <a:srgbClr val="F4F7FD"/>
+          </a:solidFill>
+          <a:ln/>
+        </p:spPr>
+      </p:sp>
+      <p:sp>
+        <p:nvSpPr>
+          <p:cNvPr id="50" name="Text 47"/>
+          <p:cNvSpPr txBox="1"/>
+          <p:nvPr/>
+        </p:nvSpPr>
+        <p:spPr>
+          <a:xfrm>
+            <a:off x="8138160" y="2752344"/>
+            <a:ext cx="2971800" cy="502920"/>
+          </a:xfrm>
+          <a:prstGeom prst="rect">
+            <a:avLst/>
+          </a:prstGeom>
+          <a:noFill/>
+          <a:ln/>
+        </p:spPr>
+        <p:txBody>
+          <a:bodyPr wrap="square" lIns="0" tIns="0" rIns="0" bIns="0" rtlCol="0" anchor="ctr"/>
+          <a:lstStyle/>
+          <a:p>
+            <a:pPr indent="0" marL="0">
+              <a:buNone/>
+            </a:pPr>
+            <a:r>
+              <a:rPr lang="en-US" sz="1250" dirty="0">
+                <a:solidFill>
+                  <a:srgbClr val="1E2761"/>
+                </a:solidFill>
+                <a:latin typeface="Cambria" pitchFamily="34" charset="0"/>
+                <a:ea typeface="Cambria" pitchFamily="34" charset="-122"/>
+                <a:cs typeface="Cambria" pitchFamily="34" charset="-120"/>
+              </a:rPr>
+              <a:t>wir liegen hinten, nur ein Tor.</a:t>
+            </a:r>
+            <a:endParaRPr lang="en-US" sz="1250" dirty="0"/>
+          </a:p>
+        </p:txBody>
+      </p:sp>
+      <p:sp>
+        <p:nvSpPr>
+          <p:cNvPr id="51" name="Shape 48"/>
+          <p:cNvSpPr/>
+          <p:nvPr/>
+        </p:nvSpPr>
+        <p:spPr>
+          <a:xfrm>
+            <a:off x="11173968" y="2807208"/>
+            <a:ext cx="411480" cy="365760"/>
+          </a:xfrm>
+          <a:prstGeom prst="roundRect">
+            <a:avLst>
+              <a:gd name="adj" fmla="val 50000"/>
+            </a:avLst>
+          </a:prstGeom>
+          <a:solidFill>
+            <a:srgbClr val="C77C12"/>
+          </a:solidFill>
+          <a:ln/>
+        </p:spPr>
+      </p:sp>
+      <p:sp>
+        <p:nvSpPr>
+          <p:cNvPr id="52" name="Text 49"/>
+          <p:cNvSpPr txBox="1"/>
+          <p:nvPr/>
+        </p:nvSpPr>
+        <p:spPr>
+          <a:xfrm>
+            <a:off x="11173968" y="2807208"/>
+            <a:ext cx="411480" cy="365760"/>
+          </a:xfrm>
+          <a:prstGeom prst="rect">
+            <a:avLst/>
+          </a:prstGeom>
+          <a:noFill/>
+          <a:ln/>
+        </p:spPr>
+        <p:txBody>
+          <a:bodyPr wrap="square" lIns="0" tIns="0" rIns="0" bIns="0" rtlCol="0" anchor="ctr"/>
+          <a:lstStyle/>
+          <a:p>
+            <a:pPr algn="ctr" indent="0" marL="0">
+              <a:buNone/>
+            </a:pPr>
+            <a:r>
+              <a:rPr lang="en-US" sz="1600" b="1" dirty="0">
+                <a:solidFill>
+                  <a:srgbClr val="FFFFFF"/>
+                </a:solidFill>
+                <a:latin typeface="Calibri" pitchFamily="34" charset="0"/>
+                <a:ea typeface="Calibri" pitchFamily="34" charset="-122"/>
+                <a:cs typeface="Calibri" pitchFamily="34" charset="-120"/>
+              </a:rPr>
+              <a:t>b</a:t>
+            </a:r>
+            <a:endParaRPr lang="en-US" sz="1600" dirty="0"/>
+          </a:p>
+        </p:txBody>
+      </p:sp>
+      <p:sp>
+        <p:nvSpPr>
+          <p:cNvPr id="53" name="Shape 50"/>
+          <p:cNvSpPr/>
+          <p:nvPr/>
+        </p:nvSpPr>
+        <p:spPr>
+          <a:xfrm>
+            <a:off x="8046720" y="3392424"/>
+            <a:ext cx="3611880" cy="621792"/>
+          </a:xfrm>
+          <a:prstGeom prst="roundRect">
+            <a:avLst>
+              <a:gd name="adj" fmla="val 7353"/>
+            </a:avLst>
+          </a:prstGeom>
+          <a:solidFill>
+            <a:srgbClr val="F4F7FD"/>
+          </a:solidFill>
+          <a:ln/>
+        </p:spPr>
+      </p:sp>
+      <p:sp>
+        <p:nvSpPr>
+          <p:cNvPr id="54" name="Text 51"/>
+          <p:cNvSpPr txBox="1"/>
+          <p:nvPr/>
+        </p:nvSpPr>
+        <p:spPr>
+          <a:xfrm>
+            <a:off x="8138160" y="3465576"/>
+            <a:ext cx="2971800" cy="502920"/>
+          </a:xfrm>
+          <a:prstGeom prst="rect">
+            <a:avLst/>
+          </a:prstGeom>
+          <a:noFill/>
+          <a:ln/>
+        </p:spPr>
+        <p:txBody>
+          <a:bodyPr wrap="square" lIns="0" tIns="0" rIns="0" bIns="0" rtlCol="0" anchor="ctr"/>
+          <a:lstStyle/>
+          <a:p>
+            <a:pPr indent="0" marL="0">
+              <a:buNone/>
+            </a:pPr>
+            <a:r>
+              <a:rPr lang="en-US" sz="1250" dirty="0">
+                <a:solidFill>
+                  <a:srgbClr val="1E2761"/>
+                </a:solidFill>
+                <a:latin typeface="Cambria" pitchFamily="34" charset="0"/>
+                <a:ea typeface="Cambria" pitchFamily="34" charset="-122"/>
+                <a:cs typeface="Cambria" pitchFamily="34" charset="-120"/>
+              </a:rPr>
+              <a:t>Der Trainer ruft: „Jetzt alle vor!“</a:t>
+            </a:r>
+            <a:endParaRPr lang="en-US" sz="1250" dirty="0"/>
+          </a:p>
+        </p:txBody>
+      </p:sp>
+      <p:sp>
+        <p:nvSpPr>
+          <p:cNvPr id="55" name="Shape 52"/>
+          <p:cNvSpPr/>
+          <p:nvPr/>
+        </p:nvSpPr>
+        <p:spPr>
+          <a:xfrm>
+            <a:off x="11173968" y="3520440"/>
+            <a:ext cx="411480" cy="365760"/>
+          </a:xfrm>
+          <a:prstGeom prst="roundRect">
+            <a:avLst>
+              <a:gd name="adj" fmla="val 50000"/>
+            </a:avLst>
+          </a:prstGeom>
+          <a:solidFill>
+            <a:srgbClr val="C77C12"/>
+          </a:solidFill>
+          <a:ln/>
+        </p:spPr>
+      </p:sp>
+      <p:sp>
+        <p:nvSpPr>
+          <p:cNvPr id="56" name="Text 53"/>
+          <p:cNvSpPr txBox="1"/>
+          <p:nvPr/>
+        </p:nvSpPr>
+        <p:spPr>
+          <a:xfrm>
+            <a:off x="11173968" y="3520440"/>
+            <a:ext cx="411480" cy="365760"/>
+          </a:xfrm>
+          <a:prstGeom prst="rect">
+            <a:avLst/>
+          </a:prstGeom>
+          <a:noFill/>
+          <a:ln/>
+        </p:spPr>
+        <p:txBody>
+          <a:bodyPr wrap="square" lIns="0" tIns="0" rIns="0" bIns="0" rtlCol="0" anchor="ctr"/>
+          <a:lstStyle/>
+          <a:p>
+            <a:pPr algn="ctr" indent="0" marL="0">
+              <a:buNone/>
+            </a:pPr>
+            <a:r>
+              <a:rPr lang="en-US" sz="1600" b="1" dirty="0">
+                <a:solidFill>
+                  <a:srgbClr val="FFFFFF"/>
+                </a:solidFill>
+                <a:latin typeface="Calibri" pitchFamily="34" charset="0"/>
+                <a:ea typeface="Calibri" pitchFamily="34" charset="-122"/>
+                <a:cs typeface="Calibri" pitchFamily="34" charset="-120"/>
+              </a:rPr>
+              <a:t>b</a:t>
+            </a:r>
+            <a:endParaRPr lang="en-US" sz="1600" dirty="0"/>
+          </a:p>
+        </p:txBody>
+      </p:sp>
+      <p:sp>
+        <p:nvSpPr>
+          <p:cNvPr id="57" name="Shape 54"/>
+          <p:cNvSpPr/>
+          <p:nvPr/>
+        </p:nvSpPr>
+        <p:spPr>
+          <a:xfrm>
+            <a:off x="8046720" y="4105656"/>
+            <a:ext cx="3611880" cy="621792"/>
+          </a:xfrm>
+          <a:prstGeom prst="roundRect">
+            <a:avLst>
+              <a:gd name="adj" fmla="val 7353"/>
+            </a:avLst>
+          </a:prstGeom>
+          <a:solidFill>
+            <a:srgbClr val="F4F7FD"/>
+          </a:solidFill>
+          <a:ln/>
+        </p:spPr>
+      </p:sp>
+      <p:sp>
+        <p:nvSpPr>
+          <p:cNvPr id="58" name="Text 55"/>
+          <p:cNvSpPr txBox="1"/>
+          <p:nvPr/>
+        </p:nvSpPr>
+        <p:spPr>
+          <a:xfrm>
+            <a:off x="8138160" y="4178808"/>
+            <a:ext cx="2971800" cy="502920"/>
+          </a:xfrm>
+          <a:prstGeom prst="rect">
+            <a:avLst/>
+          </a:prstGeom>
+          <a:noFill/>
+          <a:ln/>
+        </p:spPr>
+        <p:txBody>
+          <a:bodyPr wrap="square" lIns="0" tIns="0" rIns="0" bIns="0" rtlCol="0" anchor="ctr"/>
+          <a:lstStyle/>
+          <a:p>
+            <a:pPr indent="0" marL="0">
+              <a:buNone/>
+            </a:pPr>
+            <a:r>
+              <a:rPr lang="en-US" sz="1250" dirty="0">
+                <a:solidFill>
+                  <a:srgbClr val="1E2761"/>
+                </a:solidFill>
+                <a:latin typeface="Cambria" pitchFamily="34" charset="0"/>
+                <a:ea typeface="Cambria" pitchFamily="34" charset="-122"/>
+                <a:cs typeface="Cambria" pitchFamily="34" charset="-120"/>
+              </a:rPr>
+              <a:t>Wir kämpfen bis zum Schluss ums Ziel.</a:t>
+            </a:r>
+            <a:endParaRPr lang="en-US" sz="1250" dirty="0"/>
+          </a:p>
+        </p:txBody>
+      </p:sp>
+      <p:sp>
+        <p:nvSpPr>
+          <p:cNvPr id="59" name="Shape 56"/>
+          <p:cNvSpPr/>
+          <p:nvPr/>
+        </p:nvSpPr>
+        <p:spPr>
+          <a:xfrm>
+            <a:off x="11173968" y="4233672"/>
+            <a:ext cx="411480" cy="365760"/>
+          </a:xfrm>
+          <a:prstGeom prst="roundRect">
+            <a:avLst>
+              <a:gd name="adj" fmla="val 50000"/>
+            </a:avLst>
+          </a:prstGeom>
+          <a:solidFill>
+            <a:srgbClr val="2A8C8C"/>
+          </a:solidFill>
+          <a:ln/>
+        </p:spPr>
+      </p:sp>
+      <p:sp>
+        <p:nvSpPr>
+          <p:cNvPr id="60" name="Text 57"/>
+          <p:cNvSpPr txBox="1"/>
+          <p:nvPr/>
+        </p:nvSpPr>
+        <p:spPr>
+          <a:xfrm>
+            <a:off x="11173968" y="4233672"/>
+            <a:ext cx="411480" cy="365760"/>
+          </a:xfrm>
+          <a:prstGeom prst="rect">
+            <a:avLst/>
+          </a:prstGeom>
+          <a:noFill/>
+          <a:ln/>
+        </p:spPr>
+        <p:txBody>
+          <a:bodyPr wrap="square" lIns="0" tIns="0" rIns="0" bIns="0" rtlCol="0" anchor="ctr"/>
+          <a:lstStyle/>
+          <a:p>
+            <a:pPr algn="ctr" indent="0" marL="0">
+              <a:buNone/>
+            </a:pPr>
+            <a:r>
+              <a:rPr lang="en-US" sz="1600" b="1" dirty="0">
+                <a:solidFill>
+                  <a:srgbClr val="FFFFFF"/>
+                </a:solidFill>
+                <a:latin typeface="Calibri" pitchFamily="34" charset="0"/>
+                <a:ea typeface="Calibri" pitchFamily="34" charset="-122"/>
+                <a:cs typeface="Calibri" pitchFamily="34" charset="-120"/>
+              </a:rPr>
+              <a:t>a</a:t>
+            </a:r>
+            <a:endParaRPr lang="en-US" sz="1600" dirty="0"/>
+          </a:p>
+        </p:txBody>
+      </p:sp>
+      <p:sp>
+        <p:nvSpPr>
+          <p:cNvPr id="61" name="Shape 58"/>
+          <p:cNvSpPr/>
+          <p:nvPr/>
+        </p:nvSpPr>
+        <p:spPr>
+          <a:xfrm>
+            <a:off x="548640" y="4983480"/>
             <a:ext cx="11064240" cy="777240"/>
           </a:xfrm>
           <a:prstGeom prst="roundRect">
@@ -5373,13 +7705,13 @@
       </p:sp>
       <p:sp>
         <p:nvSpPr>
-          <p:cNvPr id="24" name="Text 21"/>
-          <p:cNvSpPr txBox="1"/>
-          <p:nvPr/>
-        </p:nvSpPr>
-        <p:spPr>
-          <a:xfrm>
-            <a:off x="822960" y="5230368"/>
+          <p:cNvPr id="62" name="Text 59"/>
+          <p:cNvSpPr txBox="1"/>
+          <p:nvPr/>
+        </p:nvSpPr>
+        <p:spPr>
+          <a:xfrm>
+            <a:off x="822960" y="5138928"/>
             <a:ext cx="10607040" cy="502920"/>
           </a:xfrm>
           <a:prstGeom prst="rect">
@@ -5419,6 +7751,20 @@
                 <a:cs typeface="Calibri" pitchFamily="34" charset="-120"/>
               </a:rPr>
               <a:t>umarmender Reim (abba)</a:t>
+            </a:r>
+            <a:pPr indent="0" marL="0">
+              <a:buNone/>
+            </a:pPr>
+            <a:r>
+              <a:rPr lang="en-US" sz="2400" dirty="0">
+                <a:solidFill>
+                  <a:srgbClr val="1E2761"/>
+                </a:solidFill>
+                <a:latin typeface="Calibri" pitchFamily="34" charset="0"/>
+                <a:ea typeface="Calibri" pitchFamily="34" charset="-122"/>
+                <a:cs typeface="Calibri" pitchFamily="34" charset="-120"/>
+              </a:rPr>
+              <a:t>  – in allen drei Fassungen</a:t>
             </a:r>
             <a:endParaRPr lang="en-US" sz="2400" dirty="0"/>
           </a:p>
@@ -5528,7 +7874,7 @@
                 <a:ea typeface="Cambria" pitchFamily="34" charset="-122"/>
                 <a:cs typeface="Cambria" pitchFamily="34" charset="-120"/>
               </a:rPr>
-              <a:t>Ü3  Lösung – 4  Im Siebenmeterkreis</a:t>
+              <a:t>Ü3  Lösung – Nr. 4: Paarreim (aabb)</a:t>
             </a:r>
             <a:endParaRPr lang="en-US" sz="3200" dirty="0"/>
           </a:p>
@@ -5620,12 +7966,73 @@
         </p:nvSpPr>
         <p:spPr>
           <a:xfrm>
-            <a:off x="548640" y="1554480"/>
-            <a:ext cx="8778240" cy="548640"/>
+            <a:off x="548640" y="1417320"/>
+            <a:ext cx="3611880" cy="411480"/>
           </a:xfrm>
           <a:prstGeom prst="roundRect">
             <a:avLst>
-              <a:gd name="adj" fmla="val 13333"/>
+              <a:gd name="adj" fmla="val 11111"/>
+            </a:avLst>
+          </a:prstGeom>
+          <a:solidFill>
+            <a:srgbClr val="1E2761"/>
+          </a:solidFill>
+          <a:ln/>
+        </p:spPr>
+      </p:sp>
+      <p:sp>
+        <p:nvSpPr>
+          <p:cNvPr id="8" name="Text 5"/>
+          <p:cNvSpPr txBox="1"/>
+          <p:nvPr/>
+        </p:nvSpPr>
+        <p:spPr>
+          <a:xfrm>
+            <a:off x="548640" y="1417320"/>
+            <a:ext cx="3611880" cy="411480"/>
+          </a:xfrm>
+          <a:prstGeom prst="rect">
+            <a:avLst/>
+          </a:prstGeom>
+          <a:noFill/>
+          <a:ln/>
+        </p:spPr>
+        <p:txBody>
+          <a:bodyPr wrap="square" lIns="0" tIns="0" rIns="0" bIns="0" rtlCol="0" anchor="ctr"/>
+          <a:lstStyle/>
+          <a:p>
+            <a:pPr algn="ctr" indent="0" marL="0">
+              <a:buNone/>
+            </a:pPr>
+            <a:r>
+              <a:rPr lang="en-US" sz="1500" b="1" dirty="0">
+                <a:solidFill>
+                  <a:srgbClr val="FFFFFF"/>
+                </a:solidFill>
+                <a:latin typeface="Calibri" pitchFamily="34" charset="0"/>
+                <a:ea typeface="Calibri" pitchFamily="34" charset="-122"/>
+                <a:cs typeface="Calibri" pitchFamily="34" charset="-120"/>
+              </a:rPr>
+              <a:t>Gewichtheben</a:t>
+            </a:r>
+            <a:endParaRPr lang="en-US" sz="1500" dirty="0"/>
+          </a:p>
+        </p:txBody>
+      </p:sp>
+      <p:sp>
+        <p:nvSpPr>
+          <p:cNvPr id="9" name="Shape 6"/>
+          <p:cNvSpPr/>
+          <p:nvPr/>
+        </p:nvSpPr>
+        <p:spPr>
+          <a:xfrm>
+            <a:off x="548640" y="1965960"/>
+            <a:ext cx="3611880" cy="621792"/>
+          </a:xfrm>
+          <a:prstGeom prst="roundRect">
+            <a:avLst>
+              <a:gd name="adj" fmla="val 7353"/>
             </a:avLst>
           </a:prstGeom>
           <a:solidFill>
@@ -5636,30 +8043,30 @@
       </p:sp>
       <p:sp>
         <p:nvSpPr>
-          <p:cNvPr id="8" name="Text 5"/>
-          <p:cNvSpPr txBox="1"/>
-          <p:nvPr/>
-        </p:nvSpPr>
-        <p:spPr>
-          <a:xfrm>
-            <a:off x="822960" y="1645920"/>
-            <a:ext cx="8412480" cy="411480"/>
-          </a:xfrm>
-          <a:prstGeom prst="rect">
-            <a:avLst/>
-          </a:prstGeom>
-          <a:noFill/>
-          <a:ln/>
-        </p:spPr>
-        <p:txBody>
-          <a:bodyPr wrap="square" lIns="0" tIns="0" rIns="0" bIns="0" rtlCol="0" anchor="t"/>
-          <a:lstStyle/>
-          <a:p>
-            <a:pPr indent="0" marL="0">
-              <a:buNone/>
-            </a:pPr>
-            <a:r>
-              <a:rPr lang="en-US" sz="2200" dirty="0">
+          <p:cNvPr id="10" name="Text 7"/>
+          <p:cNvSpPr txBox="1"/>
+          <p:nvPr/>
+        </p:nvSpPr>
+        <p:spPr>
+          <a:xfrm>
+            <a:off x="640080" y="2039112"/>
+            <a:ext cx="2971800" cy="502920"/>
+          </a:xfrm>
+          <a:prstGeom prst="rect">
+            <a:avLst/>
+          </a:prstGeom>
+          <a:noFill/>
+          <a:ln/>
+        </p:spPr>
+        <p:txBody>
+          <a:bodyPr wrap="square" lIns="0" tIns="0" rIns="0" bIns="0" rtlCol="0" anchor="ctr"/>
+          <a:lstStyle/>
+          <a:p>
+            <a:pPr indent="0" marL="0">
+              <a:buNone/>
+            </a:pPr>
+            <a:r>
+              <a:rPr lang="en-US" sz="1250" dirty="0">
                 <a:solidFill>
                   <a:srgbClr val="1E2761"/>
                 </a:solidFill>
@@ -5667,22 +8074,22 @@
                 <a:ea typeface="Cambria" pitchFamily="34" charset="-122"/>
                 <a:cs typeface="Cambria" pitchFamily="34" charset="-120"/>
               </a:rPr>
-              <a:t>Zehn Sekunden noch, der Ball ist frei,</a:t>
-            </a:r>
-            <a:endParaRPr lang="en-US" sz="2200" dirty="0"/>
-          </a:p>
-        </p:txBody>
-      </p:sp>
-      <p:sp>
-        <p:nvSpPr>
-          <p:cNvPr id="9" name="Shape 6"/>
+              <a:t>Ich kreide meine Hände ein,</a:t>
+            </a:r>
+            <a:endParaRPr lang="en-US" sz="1250" dirty="0"/>
+          </a:p>
+        </p:txBody>
+      </p:sp>
+      <p:sp>
+        <p:nvSpPr>
+          <p:cNvPr id="11" name="Shape 8"/>
           <p:cNvSpPr/>
           <p:nvPr/>
         </p:nvSpPr>
         <p:spPr>
           <a:xfrm>
-            <a:off x="9555480" y="1600200"/>
-            <a:ext cx="822960" cy="457200"/>
+            <a:off x="3675888" y="2093976"/>
+            <a:ext cx="411480" cy="365760"/>
           </a:xfrm>
           <a:prstGeom prst="roundRect">
             <a:avLst>
@@ -5697,14 +8104,14 @@
       </p:sp>
       <p:sp>
         <p:nvSpPr>
-          <p:cNvPr id="10" name="Text 7"/>
-          <p:cNvSpPr txBox="1"/>
-          <p:nvPr/>
-        </p:nvSpPr>
-        <p:spPr>
-          <a:xfrm>
-            <a:off x="9555480" y="1600200"/>
-            <a:ext cx="822960" cy="457200"/>
+          <p:cNvPr id="12" name="Text 9"/>
+          <p:cNvSpPr txBox="1"/>
+          <p:nvPr/>
+        </p:nvSpPr>
+        <p:spPr>
+          <a:xfrm>
+            <a:off x="3675888" y="2093976"/>
+            <a:ext cx="411480" cy="365760"/>
           </a:xfrm>
           <a:prstGeom prst="rect">
             <a:avLst/>
@@ -5720,7 +8127,7 @@
               <a:buNone/>
             </a:pPr>
             <a:r>
-              <a:rPr lang="en-US" sz="2200" b="1" dirty="0">
+              <a:rPr lang="en-US" sz="1600" b="1" dirty="0">
                 <a:solidFill>
                   <a:srgbClr val="FFFFFF"/>
                 </a:solidFill>
@@ -5730,24 +8137,24 @@
               </a:rPr>
               <a:t>a</a:t>
             </a:r>
-            <a:endParaRPr lang="en-US" sz="2200" dirty="0"/>
-          </a:p>
-        </p:txBody>
-      </p:sp>
-      <p:sp>
-        <p:nvSpPr>
-          <p:cNvPr id="11" name="Shape 8"/>
+            <a:endParaRPr lang="en-US" sz="1600" dirty="0"/>
+          </a:p>
+        </p:txBody>
+      </p:sp>
+      <p:sp>
+        <p:nvSpPr>
+          <p:cNvPr id="13" name="Shape 10"/>
           <p:cNvSpPr/>
           <p:nvPr/>
         </p:nvSpPr>
         <p:spPr>
           <a:xfrm>
-            <a:off x="548640" y="2212848"/>
-            <a:ext cx="8778240" cy="548640"/>
+            <a:off x="548640" y="2679192"/>
+            <a:ext cx="3611880" cy="621792"/>
           </a:xfrm>
           <a:prstGeom prst="roundRect">
             <a:avLst>
-              <a:gd name="adj" fmla="val 13333"/>
+              <a:gd name="adj" fmla="val 7353"/>
             </a:avLst>
           </a:prstGeom>
           <a:solidFill>
@@ -5758,30 +8165,30 @@
       </p:sp>
       <p:sp>
         <p:nvSpPr>
-          <p:cNvPr id="12" name="Text 9"/>
-          <p:cNvSpPr txBox="1"/>
-          <p:nvPr/>
-        </p:nvSpPr>
-        <p:spPr>
-          <a:xfrm>
-            <a:off x="822960" y="2304288"/>
-            <a:ext cx="8412480" cy="411480"/>
-          </a:xfrm>
-          <a:prstGeom prst="rect">
-            <a:avLst/>
-          </a:prstGeom>
-          <a:noFill/>
-          <a:ln/>
-        </p:spPr>
-        <p:txBody>
-          <a:bodyPr wrap="square" lIns="0" tIns="0" rIns="0" bIns="0" rtlCol="0" anchor="t"/>
-          <a:lstStyle/>
-          <a:p>
-            <a:pPr indent="0" marL="0">
-              <a:buNone/>
-            </a:pPr>
-            <a:r>
-              <a:rPr lang="en-US" sz="2200" dirty="0">
+          <p:cNvPr id="14" name="Text 11"/>
+          <p:cNvSpPr txBox="1"/>
+          <p:nvPr/>
+        </p:nvSpPr>
+        <p:spPr>
+          <a:xfrm>
+            <a:off x="640080" y="2752344"/>
+            <a:ext cx="2971800" cy="502920"/>
+          </a:xfrm>
+          <a:prstGeom prst="rect">
+            <a:avLst/>
+          </a:prstGeom>
+          <a:noFill/>
+          <a:ln/>
+        </p:spPr>
+        <p:txBody>
+          <a:bodyPr wrap="square" lIns="0" tIns="0" rIns="0" bIns="0" rtlCol="0" anchor="ctr"/>
+          <a:lstStyle/>
+          <a:p>
+            <a:pPr indent="0" marL="0">
+              <a:buNone/>
+            </a:pPr>
+            <a:r>
+              <a:rPr lang="en-US" sz="1250" dirty="0">
                 <a:solidFill>
                   <a:srgbClr val="1E2761"/>
                 </a:solidFill>
@@ -5789,22 +8196,22 @@
                 <a:ea typeface="Cambria" pitchFamily="34" charset="-122"/>
                 <a:cs typeface="Cambria" pitchFamily="34" charset="-120"/>
               </a:rPr>
-              <a:t>ich zieh nach innen, schnell vorbei,</a:t>
-            </a:r>
-            <a:endParaRPr lang="en-US" sz="2200" dirty="0"/>
-          </a:p>
-        </p:txBody>
-      </p:sp>
-      <p:sp>
-        <p:nvSpPr>
-          <p:cNvPr id="13" name="Shape 10"/>
+              <a:t>heut soll der Rekord der meine sein.</a:t>
+            </a:r>
+            <a:endParaRPr lang="en-US" sz="1250" dirty="0"/>
+          </a:p>
+        </p:txBody>
+      </p:sp>
+      <p:sp>
+        <p:nvSpPr>
+          <p:cNvPr id="15" name="Shape 12"/>
           <p:cNvSpPr/>
           <p:nvPr/>
         </p:nvSpPr>
         <p:spPr>
           <a:xfrm>
-            <a:off x="9555480" y="2258568"/>
-            <a:ext cx="822960" cy="457200"/>
+            <a:off x="3675888" y="2807208"/>
+            <a:ext cx="411480" cy="365760"/>
           </a:xfrm>
           <a:prstGeom prst="roundRect">
             <a:avLst>
@@ -5819,14 +8226,14 @@
       </p:sp>
       <p:sp>
         <p:nvSpPr>
-          <p:cNvPr id="14" name="Text 11"/>
-          <p:cNvSpPr txBox="1"/>
-          <p:nvPr/>
-        </p:nvSpPr>
-        <p:spPr>
-          <a:xfrm>
-            <a:off x="9555480" y="2258568"/>
-            <a:ext cx="822960" cy="457200"/>
+          <p:cNvPr id="16" name="Text 13"/>
+          <p:cNvSpPr txBox="1"/>
+          <p:nvPr/>
+        </p:nvSpPr>
+        <p:spPr>
+          <a:xfrm>
+            <a:off x="3675888" y="2807208"/>
+            <a:ext cx="411480" cy="365760"/>
           </a:xfrm>
           <a:prstGeom prst="rect">
             <a:avLst/>
@@ -5842,7 +8249,7 @@
               <a:buNone/>
             </a:pPr>
             <a:r>
-              <a:rPr lang="en-US" sz="2200" b="1" dirty="0">
+              <a:rPr lang="en-US" sz="1600" b="1" dirty="0">
                 <a:solidFill>
                   <a:srgbClr val="FFFFFF"/>
                 </a:solidFill>
@@ -5852,24 +8259,24 @@
               </a:rPr>
               <a:t>a</a:t>
             </a:r>
-            <a:endParaRPr lang="en-US" sz="2200" dirty="0"/>
-          </a:p>
-        </p:txBody>
-      </p:sp>
-      <p:sp>
-        <p:nvSpPr>
-          <p:cNvPr id="15" name="Shape 12"/>
+            <a:endParaRPr lang="en-US" sz="1600" dirty="0"/>
+          </a:p>
+        </p:txBody>
+      </p:sp>
+      <p:sp>
+        <p:nvSpPr>
+          <p:cNvPr id="17" name="Shape 14"/>
           <p:cNvSpPr/>
           <p:nvPr/>
         </p:nvSpPr>
         <p:spPr>
           <a:xfrm>
-            <a:off x="548640" y="2871216"/>
-            <a:ext cx="8778240" cy="548640"/>
+            <a:off x="548640" y="3392424"/>
+            <a:ext cx="3611880" cy="621792"/>
           </a:xfrm>
           <a:prstGeom prst="roundRect">
             <a:avLst>
-              <a:gd name="adj" fmla="val 13333"/>
+              <a:gd name="adj" fmla="val 7353"/>
             </a:avLst>
           </a:prstGeom>
           <a:solidFill>
@@ -5880,30 +8287,30 @@
       </p:sp>
       <p:sp>
         <p:nvSpPr>
-          <p:cNvPr id="16" name="Text 13"/>
-          <p:cNvSpPr txBox="1"/>
-          <p:nvPr/>
-        </p:nvSpPr>
-        <p:spPr>
-          <a:xfrm>
-            <a:off x="822960" y="2962656"/>
-            <a:ext cx="8412480" cy="411480"/>
-          </a:xfrm>
-          <a:prstGeom prst="rect">
-            <a:avLst/>
-          </a:prstGeom>
-          <a:noFill/>
-          <a:ln/>
-        </p:spPr>
-        <p:txBody>
-          <a:bodyPr wrap="square" lIns="0" tIns="0" rIns="0" bIns="0" rtlCol="0" anchor="t"/>
-          <a:lstStyle/>
-          <a:p>
-            <a:pPr indent="0" marL="0">
-              <a:buNone/>
-            </a:pPr>
-            <a:r>
-              <a:rPr lang="en-US" sz="2200" dirty="0">
+          <p:cNvPr id="18" name="Text 15"/>
+          <p:cNvSpPr txBox="1"/>
+          <p:nvPr/>
+        </p:nvSpPr>
+        <p:spPr>
+          <a:xfrm>
+            <a:off x="640080" y="3465576"/>
+            <a:ext cx="2971800" cy="502920"/>
+          </a:xfrm>
+          <a:prstGeom prst="rect">
+            <a:avLst/>
+          </a:prstGeom>
+          <a:noFill/>
+          <a:ln/>
+        </p:spPr>
+        <p:txBody>
+          <a:bodyPr wrap="square" lIns="0" tIns="0" rIns="0" bIns="0" rtlCol="0" anchor="ctr"/>
+          <a:lstStyle/>
+          <a:p>
+            <a:pPr indent="0" marL="0">
+              <a:buNone/>
+            </a:pPr>
+            <a:r>
+              <a:rPr lang="en-US" sz="1250" dirty="0">
                 <a:solidFill>
                   <a:srgbClr val="1E2761"/>
                 </a:solidFill>
@@ -5911,22 +8318,22 @@
                 <a:ea typeface="Cambria" pitchFamily="34" charset="-122"/>
                 <a:cs typeface="Cambria" pitchFamily="34" charset="-120"/>
               </a:rPr>
-              <a:t>ich steige hoch, der Wurf geht rein –</a:t>
-            </a:r>
-            <a:endParaRPr lang="en-US" sz="2200" dirty="0"/>
-          </a:p>
-        </p:txBody>
-      </p:sp>
-      <p:sp>
-        <p:nvSpPr>
-          <p:cNvPr id="17" name="Shape 14"/>
+              <a:t>Ich reiße hoch und steh ganz still –</a:t>
+            </a:r>
+            <a:endParaRPr lang="en-US" sz="1250" dirty="0"/>
+          </a:p>
+        </p:txBody>
+      </p:sp>
+      <p:sp>
+        <p:nvSpPr>
+          <p:cNvPr id="19" name="Shape 16"/>
           <p:cNvSpPr/>
           <p:nvPr/>
         </p:nvSpPr>
         <p:spPr>
           <a:xfrm>
-            <a:off x="9555480" y="2916936"/>
-            <a:ext cx="822960" cy="457200"/>
+            <a:off x="3675888" y="3520440"/>
+            <a:ext cx="411480" cy="365760"/>
           </a:xfrm>
           <a:prstGeom prst="roundRect">
             <a:avLst>
@@ -5941,14 +8348,14 @@
       </p:sp>
       <p:sp>
         <p:nvSpPr>
-          <p:cNvPr id="18" name="Text 15"/>
-          <p:cNvSpPr txBox="1"/>
-          <p:nvPr/>
-        </p:nvSpPr>
-        <p:spPr>
-          <a:xfrm>
-            <a:off x="9555480" y="2916936"/>
-            <a:ext cx="822960" cy="457200"/>
+          <p:cNvPr id="20" name="Text 17"/>
+          <p:cNvSpPr txBox="1"/>
+          <p:nvPr/>
+        </p:nvSpPr>
+        <p:spPr>
+          <a:xfrm>
+            <a:off x="3675888" y="3520440"/>
+            <a:ext cx="411480" cy="365760"/>
           </a:xfrm>
           <a:prstGeom prst="rect">
             <a:avLst/>
@@ -5964,7 +8371,7 @@
               <a:buNone/>
             </a:pPr>
             <a:r>
-              <a:rPr lang="en-US" sz="2200" b="1" dirty="0">
+              <a:rPr lang="en-US" sz="1600" b="1" dirty="0">
                 <a:solidFill>
                   <a:srgbClr val="FFFFFF"/>
                 </a:solidFill>
@@ -5974,24 +8381,24 @@
               </a:rPr>
               <a:t>b</a:t>
             </a:r>
-            <a:endParaRPr lang="en-US" sz="2200" dirty="0"/>
-          </a:p>
-        </p:txBody>
-      </p:sp>
-      <p:sp>
-        <p:nvSpPr>
-          <p:cNvPr id="19" name="Shape 16"/>
+            <a:endParaRPr lang="en-US" sz="1600" dirty="0"/>
+          </a:p>
+        </p:txBody>
+      </p:sp>
+      <p:sp>
+        <p:nvSpPr>
+          <p:cNvPr id="21" name="Shape 18"/>
           <p:cNvSpPr/>
           <p:nvPr/>
         </p:nvSpPr>
         <p:spPr>
           <a:xfrm>
-            <a:off x="548640" y="3529584"/>
-            <a:ext cx="8778240" cy="548640"/>
+            <a:off x="548640" y="4105656"/>
+            <a:ext cx="3611880" cy="621792"/>
           </a:xfrm>
           <a:prstGeom prst="roundRect">
             <a:avLst>
-              <a:gd name="adj" fmla="val 13333"/>
+              <a:gd name="adj" fmla="val 7353"/>
             </a:avLst>
           </a:prstGeom>
           <a:solidFill>
@@ -6002,30 +8409,30 @@
       </p:sp>
       <p:sp>
         <p:nvSpPr>
-          <p:cNvPr id="20" name="Text 17"/>
-          <p:cNvSpPr txBox="1"/>
-          <p:nvPr/>
-        </p:nvSpPr>
-        <p:spPr>
-          <a:xfrm>
-            <a:off x="822960" y="3621024"/>
-            <a:ext cx="8412480" cy="411480"/>
-          </a:xfrm>
-          <a:prstGeom prst="rect">
-            <a:avLst/>
-          </a:prstGeom>
-          <a:noFill/>
-          <a:ln/>
-        </p:spPr>
-        <p:txBody>
-          <a:bodyPr wrap="square" lIns="0" tIns="0" rIns="0" bIns="0" rtlCol="0" anchor="t"/>
-          <a:lstStyle/>
-          <a:p>
-            <a:pPr indent="0" marL="0">
-              <a:buNone/>
-            </a:pPr>
-            <a:r>
-              <a:rPr lang="en-US" sz="2200" dirty="0">
+          <p:cNvPr id="22" name="Text 19"/>
+          <p:cNvSpPr txBox="1"/>
+          <p:nvPr/>
+        </p:nvSpPr>
+        <p:spPr>
+          <a:xfrm>
+            <a:off x="640080" y="4178808"/>
+            <a:ext cx="2971800" cy="502920"/>
+          </a:xfrm>
+          <a:prstGeom prst="rect">
+            <a:avLst/>
+          </a:prstGeom>
+          <a:noFill/>
+          <a:ln/>
+        </p:spPr>
+        <p:txBody>
+          <a:bodyPr wrap="square" lIns="0" tIns="0" rIns="0" bIns="0" rtlCol="0" anchor="ctr"/>
+          <a:lstStyle/>
+          <a:p>
+            <a:pPr indent="0" marL="0">
+              <a:buNone/>
+            </a:pPr>
+            <a:r>
+              <a:rPr lang="en-US" sz="1250" dirty="0">
                 <a:solidFill>
                   <a:srgbClr val="1E2761"/>
                 </a:solidFill>
@@ -6033,22 +8440,22 @@
                 <a:ea typeface="Cambria" pitchFamily="34" charset="-122"/>
                 <a:cs typeface="Cambria" pitchFamily="34" charset="-120"/>
               </a:rPr>
-              <a:t>die ganze Halle fängt an zu schrein!</a:t>
-            </a:r>
-            <a:endParaRPr lang="en-US" sz="2200" dirty="0"/>
-          </a:p>
-        </p:txBody>
-      </p:sp>
-      <p:sp>
-        <p:nvSpPr>
-          <p:cNvPr id="21" name="Shape 18"/>
+              <a:t>drei weiße Lampen, genau, was ich will!</a:t>
+            </a:r>
+            <a:endParaRPr lang="en-US" sz="1250" dirty="0"/>
+          </a:p>
+        </p:txBody>
+      </p:sp>
+      <p:sp>
+        <p:nvSpPr>
+          <p:cNvPr id="23" name="Shape 20"/>
           <p:cNvSpPr/>
           <p:nvPr/>
         </p:nvSpPr>
         <p:spPr>
           <a:xfrm>
-            <a:off x="9555480" y="3575304"/>
-            <a:ext cx="822960" cy="457200"/>
+            <a:off x="3675888" y="4233672"/>
+            <a:ext cx="411480" cy="365760"/>
           </a:xfrm>
           <a:prstGeom prst="roundRect">
             <a:avLst>
@@ -6063,14 +8470,14 @@
       </p:sp>
       <p:sp>
         <p:nvSpPr>
-          <p:cNvPr id="22" name="Text 19"/>
-          <p:cNvSpPr txBox="1"/>
-          <p:nvPr/>
-        </p:nvSpPr>
-        <p:spPr>
-          <a:xfrm>
-            <a:off x="9555480" y="3575304"/>
-            <a:ext cx="822960" cy="457200"/>
+          <p:cNvPr id="24" name="Text 21"/>
+          <p:cNvSpPr txBox="1"/>
+          <p:nvPr/>
+        </p:nvSpPr>
+        <p:spPr>
+          <a:xfrm>
+            <a:off x="3675888" y="4233672"/>
+            <a:ext cx="411480" cy="365760"/>
           </a:xfrm>
           <a:prstGeom prst="rect">
             <a:avLst/>
@@ -6086,7 +8493,7 @@
               <a:buNone/>
             </a:pPr>
             <a:r>
-              <a:rPr lang="en-US" sz="2200" b="1" dirty="0">
+              <a:rPr lang="en-US" sz="1600" b="1" dirty="0">
                 <a:solidFill>
                   <a:srgbClr val="FFFFFF"/>
                 </a:solidFill>
@@ -6096,19 +8503,1117 @@
               </a:rPr>
               <a:t>b</a:t>
             </a:r>
-            <a:endParaRPr lang="en-US" sz="2200" dirty="0"/>
-          </a:p>
-        </p:txBody>
-      </p:sp>
-      <p:sp>
-        <p:nvSpPr>
-          <p:cNvPr id="23" name="Shape 20"/>
+            <a:endParaRPr lang="en-US" sz="1600" dirty="0"/>
+          </a:p>
+        </p:txBody>
+      </p:sp>
+      <p:sp>
+        <p:nvSpPr>
+          <p:cNvPr id="25" name="Shape 22"/>
           <p:cNvSpPr/>
           <p:nvPr/>
         </p:nvSpPr>
         <p:spPr>
           <a:xfrm>
-            <a:off x="548640" y="5074920"/>
+            <a:off x="4297680" y="1417320"/>
+            <a:ext cx="3611880" cy="411480"/>
+          </a:xfrm>
+          <a:prstGeom prst="roundRect">
+            <a:avLst>
+              <a:gd name="adj" fmla="val 11111"/>
+            </a:avLst>
+          </a:prstGeom>
+          <a:solidFill>
+            <a:srgbClr val="1E2761"/>
+          </a:solidFill>
+          <a:ln/>
+        </p:spPr>
+      </p:sp>
+      <p:sp>
+        <p:nvSpPr>
+          <p:cNvPr id="26" name="Text 23"/>
+          <p:cNvSpPr txBox="1"/>
+          <p:nvPr/>
+        </p:nvSpPr>
+        <p:spPr>
+          <a:xfrm>
+            <a:off x="4297680" y="1417320"/>
+            <a:ext cx="3611880" cy="411480"/>
+          </a:xfrm>
+          <a:prstGeom prst="rect">
+            <a:avLst/>
+          </a:prstGeom>
+          <a:noFill/>
+          <a:ln/>
+        </p:spPr>
+        <p:txBody>
+          <a:bodyPr wrap="square" lIns="0" tIns="0" rIns="0" bIns="0" rtlCol="0" anchor="ctr"/>
+          <a:lstStyle/>
+          <a:p>
+            <a:pPr algn="ctr" indent="0" marL="0">
+              <a:buNone/>
+            </a:pPr>
+            <a:r>
+              <a:rPr lang="en-US" sz="1500" b="1" dirty="0">
+                <a:solidFill>
+                  <a:srgbClr val="FFFFFF"/>
+                </a:solidFill>
+                <a:latin typeface="Calibri" pitchFamily="34" charset="0"/>
+                <a:ea typeface="Calibri" pitchFamily="34" charset="-122"/>
+                <a:cs typeface="Calibri" pitchFamily="34" charset="-120"/>
+              </a:rPr>
+              <a:t>Judo</a:t>
+            </a:r>
+            <a:endParaRPr lang="en-US" sz="1500" dirty="0"/>
+          </a:p>
+        </p:txBody>
+      </p:sp>
+      <p:sp>
+        <p:nvSpPr>
+          <p:cNvPr id="27" name="Shape 24"/>
+          <p:cNvSpPr/>
+          <p:nvPr/>
+        </p:nvSpPr>
+        <p:spPr>
+          <a:xfrm>
+            <a:off x="4297680" y="1965960"/>
+            <a:ext cx="3611880" cy="621792"/>
+          </a:xfrm>
+          <a:prstGeom prst="roundRect">
+            <a:avLst>
+              <a:gd name="adj" fmla="val 7353"/>
+            </a:avLst>
+          </a:prstGeom>
+          <a:solidFill>
+            <a:srgbClr val="F4F7FD"/>
+          </a:solidFill>
+          <a:ln/>
+        </p:spPr>
+      </p:sp>
+      <p:sp>
+        <p:nvSpPr>
+          <p:cNvPr id="28" name="Text 25"/>
+          <p:cNvSpPr txBox="1"/>
+          <p:nvPr/>
+        </p:nvSpPr>
+        <p:spPr>
+          <a:xfrm>
+            <a:off x="4389120" y="2039112"/>
+            <a:ext cx="2971800" cy="502920"/>
+          </a:xfrm>
+          <a:prstGeom prst="rect">
+            <a:avLst/>
+          </a:prstGeom>
+          <a:noFill/>
+          <a:ln/>
+        </p:spPr>
+        <p:txBody>
+          <a:bodyPr wrap="square" lIns="0" tIns="0" rIns="0" bIns="0" rtlCol="0" anchor="ctr"/>
+          <a:lstStyle/>
+          <a:p>
+            <a:pPr indent="0" marL="0">
+              <a:buNone/>
+            </a:pPr>
+            <a:r>
+              <a:rPr lang="en-US" sz="1250" dirty="0">
+                <a:solidFill>
+                  <a:srgbClr val="1E2761"/>
+                </a:solidFill>
+                <a:latin typeface="Cambria" pitchFamily="34" charset="0"/>
+                <a:ea typeface="Cambria" pitchFamily="34" charset="-122"/>
+                <a:cs typeface="Cambria" pitchFamily="34" charset="-120"/>
+              </a:rPr>
+              <a:t>Ich binde meinen Gürtel fest,</a:t>
+            </a:r>
+            <a:endParaRPr lang="en-US" sz="1250" dirty="0"/>
+          </a:p>
+        </p:txBody>
+      </p:sp>
+      <p:sp>
+        <p:nvSpPr>
+          <p:cNvPr id="29" name="Shape 26"/>
+          <p:cNvSpPr/>
+          <p:nvPr/>
+        </p:nvSpPr>
+        <p:spPr>
+          <a:xfrm>
+            <a:off x="7424928" y="2093976"/>
+            <a:ext cx="411480" cy="365760"/>
+          </a:xfrm>
+          <a:prstGeom prst="roundRect">
+            <a:avLst>
+              <a:gd name="adj" fmla="val 50000"/>
+            </a:avLst>
+          </a:prstGeom>
+          <a:solidFill>
+            <a:srgbClr val="2A8C8C"/>
+          </a:solidFill>
+          <a:ln/>
+        </p:spPr>
+      </p:sp>
+      <p:sp>
+        <p:nvSpPr>
+          <p:cNvPr id="30" name="Text 27"/>
+          <p:cNvSpPr txBox="1"/>
+          <p:nvPr/>
+        </p:nvSpPr>
+        <p:spPr>
+          <a:xfrm>
+            <a:off x="7424928" y="2093976"/>
+            <a:ext cx="411480" cy="365760"/>
+          </a:xfrm>
+          <a:prstGeom prst="rect">
+            <a:avLst/>
+          </a:prstGeom>
+          <a:noFill/>
+          <a:ln/>
+        </p:spPr>
+        <p:txBody>
+          <a:bodyPr wrap="square" lIns="0" tIns="0" rIns="0" bIns="0" rtlCol="0" anchor="ctr"/>
+          <a:lstStyle/>
+          <a:p>
+            <a:pPr algn="ctr" indent="0" marL="0">
+              <a:buNone/>
+            </a:pPr>
+            <a:r>
+              <a:rPr lang="en-US" sz="1600" b="1" dirty="0">
+                <a:solidFill>
+                  <a:srgbClr val="FFFFFF"/>
+                </a:solidFill>
+                <a:latin typeface="Calibri" pitchFamily="34" charset="0"/>
+                <a:ea typeface="Calibri" pitchFamily="34" charset="-122"/>
+                <a:cs typeface="Calibri" pitchFamily="34" charset="-120"/>
+              </a:rPr>
+              <a:t>a</a:t>
+            </a:r>
+            <a:endParaRPr lang="en-US" sz="1600" dirty="0"/>
+          </a:p>
+        </p:txBody>
+      </p:sp>
+      <p:sp>
+        <p:nvSpPr>
+          <p:cNvPr id="31" name="Shape 28"/>
+          <p:cNvSpPr/>
+          <p:nvPr/>
+        </p:nvSpPr>
+        <p:spPr>
+          <a:xfrm>
+            <a:off x="4297680" y="2679192"/>
+            <a:ext cx="3611880" cy="621792"/>
+          </a:xfrm>
+          <a:prstGeom prst="roundRect">
+            <a:avLst>
+              <a:gd name="adj" fmla="val 7353"/>
+            </a:avLst>
+          </a:prstGeom>
+          <a:solidFill>
+            <a:srgbClr val="F4F7FD"/>
+          </a:solidFill>
+          <a:ln/>
+        </p:spPr>
+      </p:sp>
+      <p:sp>
+        <p:nvSpPr>
+          <p:cNvPr id="32" name="Text 29"/>
+          <p:cNvSpPr txBox="1"/>
+          <p:nvPr/>
+        </p:nvSpPr>
+        <p:spPr>
+          <a:xfrm>
+            <a:off x="4389120" y="2752344"/>
+            <a:ext cx="2971800" cy="502920"/>
+          </a:xfrm>
+          <a:prstGeom prst="rect">
+            <a:avLst/>
+          </a:prstGeom>
+          <a:noFill/>
+          <a:ln/>
+        </p:spPr>
+        <p:txBody>
+          <a:bodyPr wrap="square" lIns="0" tIns="0" rIns="0" bIns="0" rtlCol="0" anchor="ctr"/>
+          <a:lstStyle/>
+          <a:p>
+            <a:pPr indent="0" marL="0">
+              <a:buNone/>
+            </a:pPr>
+            <a:r>
+              <a:rPr lang="en-US" sz="1250" dirty="0">
+                <a:solidFill>
+                  <a:srgbClr val="1E2761"/>
+                </a:solidFill>
+                <a:latin typeface="Cambria" pitchFamily="34" charset="0"/>
+                <a:ea typeface="Cambria" pitchFamily="34" charset="-122"/>
+                <a:cs typeface="Cambria" pitchFamily="34" charset="-120"/>
+              </a:rPr>
+              <a:t>jetzt kommt der Kampf, jetzt kommt der Test.</a:t>
+            </a:r>
+            <a:endParaRPr lang="en-US" sz="1250" dirty="0"/>
+          </a:p>
+        </p:txBody>
+      </p:sp>
+      <p:sp>
+        <p:nvSpPr>
+          <p:cNvPr id="33" name="Shape 30"/>
+          <p:cNvSpPr/>
+          <p:nvPr/>
+        </p:nvSpPr>
+        <p:spPr>
+          <a:xfrm>
+            <a:off x="7424928" y="2807208"/>
+            <a:ext cx="411480" cy="365760"/>
+          </a:xfrm>
+          <a:prstGeom prst="roundRect">
+            <a:avLst>
+              <a:gd name="adj" fmla="val 50000"/>
+            </a:avLst>
+          </a:prstGeom>
+          <a:solidFill>
+            <a:srgbClr val="2A8C8C"/>
+          </a:solidFill>
+          <a:ln/>
+        </p:spPr>
+      </p:sp>
+      <p:sp>
+        <p:nvSpPr>
+          <p:cNvPr id="34" name="Text 31"/>
+          <p:cNvSpPr txBox="1"/>
+          <p:nvPr/>
+        </p:nvSpPr>
+        <p:spPr>
+          <a:xfrm>
+            <a:off x="7424928" y="2807208"/>
+            <a:ext cx="411480" cy="365760"/>
+          </a:xfrm>
+          <a:prstGeom prst="rect">
+            <a:avLst/>
+          </a:prstGeom>
+          <a:noFill/>
+          <a:ln/>
+        </p:spPr>
+        <p:txBody>
+          <a:bodyPr wrap="square" lIns="0" tIns="0" rIns="0" bIns="0" rtlCol="0" anchor="ctr"/>
+          <a:lstStyle/>
+          <a:p>
+            <a:pPr algn="ctr" indent="0" marL="0">
+              <a:buNone/>
+            </a:pPr>
+            <a:r>
+              <a:rPr lang="en-US" sz="1600" b="1" dirty="0">
+                <a:solidFill>
+                  <a:srgbClr val="FFFFFF"/>
+                </a:solidFill>
+                <a:latin typeface="Calibri" pitchFamily="34" charset="0"/>
+                <a:ea typeface="Calibri" pitchFamily="34" charset="-122"/>
+                <a:cs typeface="Calibri" pitchFamily="34" charset="-120"/>
+              </a:rPr>
+              <a:t>a</a:t>
+            </a:r>
+            <a:endParaRPr lang="en-US" sz="1600" dirty="0"/>
+          </a:p>
+        </p:txBody>
+      </p:sp>
+      <p:sp>
+        <p:nvSpPr>
+          <p:cNvPr id="35" name="Shape 32"/>
+          <p:cNvSpPr/>
+          <p:nvPr/>
+        </p:nvSpPr>
+        <p:spPr>
+          <a:xfrm>
+            <a:off x="4297680" y="3392424"/>
+            <a:ext cx="3611880" cy="621792"/>
+          </a:xfrm>
+          <a:prstGeom prst="roundRect">
+            <a:avLst>
+              <a:gd name="adj" fmla="val 7353"/>
+            </a:avLst>
+          </a:prstGeom>
+          <a:solidFill>
+            <a:srgbClr val="F4F7FD"/>
+          </a:solidFill>
+          <a:ln/>
+        </p:spPr>
+      </p:sp>
+      <p:sp>
+        <p:nvSpPr>
+          <p:cNvPr id="36" name="Text 33"/>
+          <p:cNvSpPr txBox="1"/>
+          <p:nvPr/>
+        </p:nvSpPr>
+        <p:spPr>
+          <a:xfrm>
+            <a:off x="4389120" y="3465576"/>
+            <a:ext cx="2971800" cy="502920"/>
+          </a:xfrm>
+          <a:prstGeom prst="rect">
+            <a:avLst/>
+          </a:prstGeom>
+          <a:noFill/>
+          <a:ln/>
+        </p:spPr>
+        <p:txBody>
+          <a:bodyPr wrap="square" lIns="0" tIns="0" rIns="0" bIns="0" rtlCol="0" anchor="ctr"/>
+          <a:lstStyle/>
+          <a:p>
+            <a:pPr indent="0" marL="0">
+              <a:buNone/>
+            </a:pPr>
+            <a:r>
+              <a:rPr lang="en-US" sz="1250" dirty="0">
+                <a:solidFill>
+                  <a:srgbClr val="1E2761"/>
+                </a:solidFill>
+                <a:latin typeface="Cambria" pitchFamily="34" charset="0"/>
+                <a:ea typeface="Cambria" pitchFamily="34" charset="-122"/>
+                <a:cs typeface="Cambria" pitchFamily="34" charset="-120"/>
+              </a:rPr>
+              <a:t>Ich greife, drehe, ziehe an –</a:t>
+            </a:r>
+            <a:endParaRPr lang="en-US" sz="1250" dirty="0"/>
+          </a:p>
+        </p:txBody>
+      </p:sp>
+      <p:sp>
+        <p:nvSpPr>
+          <p:cNvPr id="37" name="Shape 34"/>
+          <p:cNvSpPr/>
+          <p:nvPr/>
+        </p:nvSpPr>
+        <p:spPr>
+          <a:xfrm>
+            <a:off x="7424928" y="3520440"/>
+            <a:ext cx="411480" cy="365760"/>
+          </a:xfrm>
+          <a:prstGeom prst="roundRect">
+            <a:avLst>
+              <a:gd name="adj" fmla="val 50000"/>
+            </a:avLst>
+          </a:prstGeom>
+          <a:solidFill>
+            <a:srgbClr val="C77C12"/>
+          </a:solidFill>
+          <a:ln/>
+        </p:spPr>
+      </p:sp>
+      <p:sp>
+        <p:nvSpPr>
+          <p:cNvPr id="38" name="Text 35"/>
+          <p:cNvSpPr txBox="1"/>
+          <p:nvPr/>
+        </p:nvSpPr>
+        <p:spPr>
+          <a:xfrm>
+            <a:off x="7424928" y="3520440"/>
+            <a:ext cx="411480" cy="365760"/>
+          </a:xfrm>
+          <a:prstGeom prst="rect">
+            <a:avLst/>
+          </a:prstGeom>
+          <a:noFill/>
+          <a:ln/>
+        </p:spPr>
+        <p:txBody>
+          <a:bodyPr wrap="square" lIns="0" tIns="0" rIns="0" bIns="0" rtlCol="0" anchor="ctr"/>
+          <a:lstStyle/>
+          <a:p>
+            <a:pPr algn="ctr" indent="0" marL="0">
+              <a:buNone/>
+            </a:pPr>
+            <a:r>
+              <a:rPr lang="en-US" sz="1600" b="1" dirty="0">
+                <a:solidFill>
+                  <a:srgbClr val="FFFFFF"/>
+                </a:solidFill>
+                <a:latin typeface="Calibri" pitchFamily="34" charset="0"/>
+                <a:ea typeface="Calibri" pitchFamily="34" charset="-122"/>
+                <a:cs typeface="Calibri" pitchFamily="34" charset="-120"/>
+              </a:rPr>
+              <a:t>b</a:t>
+            </a:r>
+            <a:endParaRPr lang="en-US" sz="1600" dirty="0"/>
+          </a:p>
+        </p:txBody>
+      </p:sp>
+      <p:sp>
+        <p:nvSpPr>
+          <p:cNvPr id="39" name="Shape 36"/>
+          <p:cNvSpPr/>
+          <p:nvPr/>
+        </p:nvSpPr>
+        <p:spPr>
+          <a:xfrm>
+            <a:off x="4297680" y="4105656"/>
+            <a:ext cx="3611880" cy="621792"/>
+          </a:xfrm>
+          <a:prstGeom prst="roundRect">
+            <a:avLst>
+              <a:gd name="adj" fmla="val 7353"/>
+            </a:avLst>
+          </a:prstGeom>
+          <a:solidFill>
+            <a:srgbClr val="F4F7FD"/>
+          </a:solidFill>
+          <a:ln/>
+        </p:spPr>
+      </p:sp>
+      <p:sp>
+        <p:nvSpPr>
+          <p:cNvPr id="40" name="Text 37"/>
+          <p:cNvSpPr txBox="1"/>
+          <p:nvPr/>
+        </p:nvSpPr>
+        <p:spPr>
+          <a:xfrm>
+            <a:off x="4389120" y="4178808"/>
+            <a:ext cx="2971800" cy="502920"/>
+          </a:xfrm>
+          <a:prstGeom prst="rect">
+            <a:avLst/>
+          </a:prstGeom>
+          <a:noFill/>
+          <a:ln/>
+        </p:spPr>
+        <p:txBody>
+          <a:bodyPr wrap="square" lIns="0" tIns="0" rIns="0" bIns="0" rtlCol="0" anchor="ctr"/>
+          <a:lstStyle/>
+          <a:p>
+            <a:pPr indent="0" marL="0">
+              <a:buNone/>
+            </a:pPr>
+            <a:r>
+              <a:rPr lang="en-US" sz="1250" dirty="0">
+                <a:solidFill>
+                  <a:srgbClr val="1E2761"/>
+                </a:solidFill>
+                <a:latin typeface="Cambria" pitchFamily="34" charset="0"/>
+                <a:ea typeface="Cambria" pitchFamily="34" charset="-122"/>
+                <a:cs typeface="Cambria" pitchFamily="34" charset="-120"/>
+              </a:rPr>
+              <a:t>Ippon! Gewonnen hab ich dann.</a:t>
+            </a:r>
+            <a:endParaRPr lang="en-US" sz="1250" dirty="0"/>
+          </a:p>
+        </p:txBody>
+      </p:sp>
+      <p:sp>
+        <p:nvSpPr>
+          <p:cNvPr id="41" name="Shape 38"/>
+          <p:cNvSpPr/>
+          <p:nvPr/>
+        </p:nvSpPr>
+        <p:spPr>
+          <a:xfrm>
+            <a:off x="7424928" y="4233672"/>
+            <a:ext cx="411480" cy="365760"/>
+          </a:xfrm>
+          <a:prstGeom prst="roundRect">
+            <a:avLst>
+              <a:gd name="adj" fmla="val 50000"/>
+            </a:avLst>
+          </a:prstGeom>
+          <a:solidFill>
+            <a:srgbClr val="C77C12"/>
+          </a:solidFill>
+          <a:ln/>
+        </p:spPr>
+      </p:sp>
+      <p:sp>
+        <p:nvSpPr>
+          <p:cNvPr id="42" name="Text 39"/>
+          <p:cNvSpPr txBox="1"/>
+          <p:nvPr/>
+        </p:nvSpPr>
+        <p:spPr>
+          <a:xfrm>
+            <a:off x="7424928" y="4233672"/>
+            <a:ext cx="411480" cy="365760"/>
+          </a:xfrm>
+          <a:prstGeom prst="rect">
+            <a:avLst/>
+          </a:prstGeom>
+          <a:noFill/>
+          <a:ln/>
+        </p:spPr>
+        <p:txBody>
+          <a:bodyPr wrap="square" lIns="0" tIns="0" rIns="0" bIns="0" rtlCol="0" anchor="ctr"/>
+          <a:lstStyle/>
+          <a:p>
+            <a:pPr algn="ctr" indent="0" marL="0">
+              <a:buNone/>
+            </a:pPr>
+            <a:r>
+              <a:rPr lang="en-US" sz="1600" b="1" dirty="0">
+                <a:solidFill>
+                  <a:srgbClr val="FFFFFF"/>
+                </a:solidFill>
+                <a:latin typeface="Calibri" pitchFamily="34" charset="0"/>
+                <a:ea typeface="Calibri" pitchFamily="34" charset="-122"/>
+                <a:cs typeface="Calibri" pitchFamily="34" charset="-120"/>
+              </a:rPr>
+              <a:t>b</a:t>
+            </a:r>
+            <a:endParaRPr lang="en-US" sz="1600" dirty="0"/>
+          </a:p>
+        </p:txBody>
+      </p:sp>
+      <p:sp>
+        <p:nvSpPr>
+          <p:cNvPr id="43" name="Shape 40"/>
+          <p:cNvSpPr/>
+          <p:nvPr/>
+        </p:nvSpPr>
+        <p:spPr>
+          <a:xfrm>
+            <a:off x="8046720" y="1417320"/>
+            <a:ext cx="3611880" cy="411480"/>
+          </a:xfrm>
+          <a:prstGeom prst="roundRect">
+            <a:avLst>
+              <a:gd name="adj" fmla="val 11111"/>
+            </a:avLst>
+          </a:prstGeom>
+          <a:solidFill>
+            <a:srgbClr val="1E2761"/>
+          </a:solidFill>
+          <a:ln/>
+        </p:spPr>
+      </p:sp>
+      <p:sp>
+        <p:nvSpPr>
+          <p:cNvPr id="44" name="Text 41"/>
+          <p:cNvSpPr txBox="1"/>
+          <p:nvPr/>
+        </p:nvSpPr>
+        <p:spPr>
+          <a:xfrm>
+            <a:off x="8046720" y="1417320"/>
+            <a:ext cx="3611880" cy="411480"/>
+          </a:xfrm>
+          <a:prstGeom prst="rect">
+            <a:avLst/>
+          </a:prstGeom>
+          <a:noFill/>
+          <a:ln/>
+        </p:spPr>
+        <p:txBody>
+          <a:bodyPr wrap="square" lIns="0" tIns="0" rIns="0" bIns="0" rtlCol="0" anchor="ctr"/>
+          <a:lstStyle/>
+          <a:p>
+            <a:pPr algn="ctr" indent="0" marL="0">
+              <a:buNone/>
+            </a:pPr>
+            <a:r>
+              <a:rPr lang="en-US" sz="1500" b="1" dirty="0">
+                <a:solidFill>
+                  <a:srgbClr val="FFFFFF"/>
+                </a:solidFill>
+                <a:latin typeface="Calibri" pitchFamily="34" charset="0"/>
+                <a:ea typeface="Calibri" pitchFamily="34" charset="-122"/>
+                <a:cs typeface="Calibri" pitchFamily="34" charset="-120"/>
+              </a:rPr>
+              <a:t>Handball</a:t>
+            </a:r>
+            <a:endParaRPr lang="en-US" sz="1500" dirty="0"/>
+          </a:p>
+        </p:txBody>
+      </p:sp>
+      <p:sp>
+        <p:nvSpPr>
+          <p:cNvPr id="45" name="Shape 42"/>
+          <p:cNvSpPr/>
+          <p:nvPr/>
+        </p:nvSpPr>
+        <p:spPr>
+          <a:xfrm>
+            <a:off x="8046720" y="1965960"/>
+            <a:ext cx="3611880" cy="621792"/>
+          </a:xfrm>
+          <a:prstGeom prst="roundRect">
+            <a:avLst>
+              <a:gd name="adj" fmla="val 7353"/>
+            </a:avLst>
+          </a:prstGeom>
+          <a:solidFill>
+            <a:srgbClr val="F4F7FD"/>
+          </a:solidFill>
+          <a:ln/>
+        </p:spPr>
+      </p:sp>
+      <p:sp>
+        <p:nvSpPr>
+          <p:cNvPr id="46" name="Text 43"/>
+          <p:cNvSpPr txBox="1"/>
+          <p:nvPr/>
+        </p:nvSpPr>
+        <p:spPr>
+          <a:xfrm>
+            <a:off x="8138160" y="2039112"/>
+            <a:ext cx="2971800" cy="502920"/>
+          </a:xfrm>
+          <a:prstGeom prst="rect">
+            <a:avLst/>
+          </a:prstGeom>
+          <a:noFill/>
+          <a:ln/>
+        </p:spPr>
+        <p:txBody>
+          <a:bodyPr wrap="square" lIns="0" tIns="0" rIns="0" bIns="0" rtlCol="0" anchor="ctr"/>
+          <a:lstStyle/>
+          <a:p>
+            <a:pPr indent="0" marL="0">
+              <a:buNone/>
+            </a:pPr>
+            <a:r>
+              <a:rPr lang="en-US" sz="1250" dirty="0">
+                <a:solidFill>
+                  <a:srgbClr val="1E2761"/>
+                </a:solidFill>
+                <a:latin typeface="Cambria" pitchFamily="34" charset="0"/>
+                <a:ea typeface="Cambria" pitchFamily="34" charset="-122"/>
+                <a:cs typeface="Cambria" pitchFamily="34" charset="-120"/>
+              </a:rPr>
+              <a:t>Zehn Sekunden noch, der Ball ist frei,</a:t>
+            </a:r>
+            <a:endParaRPr lang="en-US" sz="1250" dirty="0"/>
+          </a:p>
+        </p:txBody>
+      </p:sp>
+      <p:sp>
+        <p:nvSpPr>
+          <p:cNvPr id="47" name="Shape 44"/>
+          <p:cNvSpPr/>
+          <p:nvPr/>
+        </p:nvSpPr>
+        <p:spPr>
+          <a:xfrm>
+            <a:off x="11173968" y="2093976"/>
+            <a:ext cx="411480" cy="365760"/>
+          </a:xfrm>
+          <a:prstGeom prst="roundRect">
+            <a:avLst>
+              <a:gd name="adj" fmla="val 50000"/>
+            </a:avLst>
+          </a:prstGeom>
+          <a:solidFill>
+            <a:srgbClr val="2A8C8C"/>
+          </a:solidFill>
+          <a:ln/>
+        </p:spPr>
+      </p:sp>
+      <p:sp>
+        <p:nvSpPr>
+          <p:cNvPr id="48" name="Text 45"/>
+          <p:cNvSpPr txBox="1"/>
+          <p:nvPr/>
+        </p:nvSpPr>
+        <p:spPr>
+          <a:xfrm>
+            <a:off x="11173968" y="2093976"/>
+            <a:ext cx="411480" cy="365760"/>
+          </a:xfrm>
+          <a:prstGeom prst="rect">
+            <a:avLst/>
+          </a:prstGeom>
+          <a:noFill/>
+          <a:ln/>
+        </p:spPr>
+        <p:txBody>
+          <a:bodyPr wrap="square" lIns="0" tIns="0" rIns="0" bIns="0" rtlCol="0" anchor="ctr"/>
+          <a:lstStyle/>
+          <a:p>
+            <a:pPr algn="ctr" indent="0" marL="0">
+              <a:buNone/>
+            </a:pPr>
+            <a:r>
+              <a:rPr lang="en-US" sz="1600" b="1" dirty="0">
+                <a:solidFill>
+                  <a:srgbClr val="FFFFFF"/>
+                </a:solidFill>
+                <a:latin typeface="Calibri" pitchFamily="34" charset="0"/>
+                <a:ea typeface="Calibri" pitchFamily="34" charset="-122"/>
+                <a:cs typeface="Calibri" pitchFamily="34" charset="-120"/>
+              </a:rPr>
+              <a:t>a</a:t>
+            </a:r>
+            <a:endParaRPr lang="en-US" sz="1600" dirty="0"/>
+          </a:p>
+        </p:txBody>
+      </p:sp>
+      <p:sp>
+        <p:nvSpPr>
+          <p:cNvPr id="49" name="Shape 46"/>
+          <p:cNvSpPr/>
+          <p:nvPr/>
+        </p:nvSpPr>
+        <p:spPr>
+          <a:xfrm>
+            <a:off x="8046720" y="2679192"/>
+            <a:ext cx="3611880" cy="621792"/>
+          </a:xfrm>
+          <a:prstGeom prst="roundRect">
+            <a:avLst>
+              <a:gd name="adj" fmla="val 7353"/>
+            </a:avLst>
+          </a:prstGeom>
+          <a:solidFill>
+            <a:srgbClr val="F4F7FD"/>
+          </a:solidFill>
+          <a:ln/>
+        </p:spPr>
+      </p:sp>
+      <p:sp>
+        <p:nvSpPr>
+          <p:cNvPr id="50" name="Text 47"/>
+          <p:cNvSpPr txBox="1"/>
+          <p:nvPr/>
+        </p:nvSpPr>
+        <p:spPr>
+          <a:xfrm>
+            <a:off x="8138160" y="2752344"/>
+            <a:ext cx="2971800" cy="502920"/>
+          </a:xfrm>
+          <a:prstGeom prst="rect">
+            <a:avLst/>
+          </a:prstGeom>
+          <a:noFill/>
+          <a:ln/>
+        </p:spPr>
+        <p:txBody>
+          <a:bodyPr wrap="square" lIns="0" tIns="0" rIns="0" bIns="0" rtlCol="0" anchor="ctr"/>
+          <a:lstStyle/>
+          <a:p>
+            <a:pPr indent="0" marL="0">
+              <a:buNone/>
+            </a:pPr>
+            <a:r>
+              <a:rPr lang="en-US" sz="1250" dirty="0">
+                <a:solidFill>
+                  <a:srgbClr val="1E2761"/>
+                </a:solidFill>
+                <a:latin typeface="Cambria" pitchFamily="34" charset="0"/>
+                <a:ea typeface="Cambria" pitchFamily="34" charset="-122"/>
+                <a:cs typeface="Cambria" pitchFamily="34" charset="-120"/>
+              </a:rPr>
+              <a:t>ich zieh nach innen, schnell vorbei,</a:t>
+            </a:r>
+            <a:endParaRPr lang="en-US" sz="1250" dirty="0"/>
+          </a:p>
+        </p:txBody>
+      </p:sp>
+      <p:sp>
+        <p:nvSpPr>
+          <p:cNvPr id="51" name="Shape 48"/>
+          <p:cNvSpPr/>
+          <p:nvPr/>
+        </p:nvSpPr>
+        <p:spPr>
+          <a:xfrm>
+            <a:off x="11173968" y="2807208"/>
+            <a:ext cx="411480" cy="365760"/>
+          </a:xfrm>
+          <a:prstGeom prst="roundRect">
+            <a:avLst>
+              <a:gd name="adj" fmla="val 50000"/>
+            </a:avLst>
+          </a:prstGeom>
+          <a:solidFill>
+            <a:srgbClr val="2A8C8C"/>
+          </a:solidFill>
+          <a:ln/>
+        </p:spPr>
+      </p:sp>
+      <p:sp>
+        <p:nvSpPr>
+          <p:cNvPr id="52" name="Text 49"/>
+          <p:cNvSpPr txBox="1"/>
+          <p:nvPr/>
+        </p:nvSpPr>
+        <p:spPr>
+          <a:xfrm>
+            <a:off x="11173968" y="2807208"/>
+            <a:ext cx="411480" cy="365760"/>
+          </a:xfrm>
+          <a:prstGeom prst="rect">
+            <a:avLst/>
+          </a:prstGeom>
+          <a:noFill/>
+          <a:ln/>
+        </p:spPr>
+        <p:txBody>
+          <a:bodyPr wrap="square" lIns="0" tIns="0" rIns="0" bIns="0" rtlCol="0" anchor="ctr"/>
+          <a:lstStyle/>
+          <a:p>
+            <a:pPr algn="ctr" indent="0" marL="0">
+              <a:buNone/>
+            </a:pPr>
+            <a:r>
+              <a:rPr lang="en-US" sz="1600" b="1" dirty="0">
+                <a:solidFill>
+                  <a:srgbClr val="FFFFFF"/>
+                </a:solidFill>
+                <a:latin typeface="Calibri" pitchFamily="34" charset="0"/>
+                <a:ea typeface="Calibri" pitchFamily="34" charset="-122"/>
+                <a:cs typeface="Calibri" pitchFamily="34" charset="-120"/>
+              </a:rPr>
+              <a:t>a</a:t>
+            </a:r>
+            <a:endParaRPr lang="en-US" sz="1600" dirty="0"/>
+          </a:p>
+        </p:txBody>
+      </p:sp>
+      <p:sp>
+        <p:nvSpPr>
+          <p:cNvPr id="53" name="Shape 50"/>
+          <p:cNvSpPr/>
+          <p:nvPr/>
+        </p:nvSpPr>
+        <p:spPr>
+          <a:xfrm>
+            <a:off x="8046720" y="3392424"/>
+            <a:ext cx="3611880" cy="621792"/>
+          </a:xfrm>
+          <a:prstGeom prst="roundRect">
+            <a:avLst>
+              <a:gd name="adj" fmla="val 7353"/>
+            </a:avLst>
+          </a:prstGeom>
+          <a:solidFill>
+            <a:srgbClr val="F4F7FD"/>
+          </a:solidFill>
+          <a:ln/>
+        </p:spPr>
+      </p:sp>
+      <p:sp>
+        <p:nvSpPr>
+          <p:cNvPr id="54" name="Text 51"/>
+          <p:cNvSpPr txBox="1"/>
+          <p:nvPr/>
+        </p:nvSpPr>
+        <p:spPr>
+          <a:xfrm>
+            <a:off x="8138160" y="3465576"/>
+            <a:ext cx="2971800" cy="502920"/>
+          </a:xfrm>
+          <a:prstGeom prst="rect">
+            <a:avLst/>
+          </a:prstGeom>
+          <a:noFill/>
+          <a:ln/>
+        </p:spPr>
+        <p:txBody>
+          <a:bodyPr wrap="square" lIns="0" tIns="0" rIns="0" bIns="0" rtlCol="0" anchor="ctr"/>
+          <a:lstStyle/>
+          <a:p>
+            <a:pPr indent="0" marL="0">
+              <a:buNone/>
+            </a:pPr>
+            <a:r>
+              <a:rPr lang="en-US" sz="1250" dirty="0">
+                <a:solidFill>
+                  <a:srgbClr val="1E2761"/>
+                </a:solidFill>
+                <a:latin typeface="Cambria" pitchFamily="34" charset="0"/>
+                <a:ea typeface="Cambria" pitchFamily="34" charset="-122"/>
+                <a:cs typeface="Cambria" pitchFamily="34" charset="-120"/>
+              </a:rPr>
+              <a:t>ich steige hoch, der Wurf geht rein –</a:t>
+            </a:r>
+            <a:endParaRPr lang="en-US" sz="1250" dirty="0"/>
+          </a:p>
+        </p:txBody>
+      </p:sp>
+      <p:sp>
+        <p:nvSpPr>
+          <p:cNvPr id="55" name="Shape 52"/>
+          <p:cNvSpPr/>
+          <p:nvPr/>
+        </p:nvSpPr>
+        <p:spPr>
+          <a:xfrm>
+            <a:off x="11173968" y="3520440"/>
+            <a:ext cx="411480" cy="365760"/>
+          </a:xfrm>
+          <a:prstGeom prst="roundRect">
+            <a:avLst>
+              <a:gd name="adj" fmla="val 50000"/>
+            </a:avLst>
+          </a:prstGeom>
+          <a:solidFill>
+            <a:srgbClr val="C77C12"/>
+          </a:solidFill>
+          <a:ln/>
+        </p:spPr>
+      </p:sp>
+      <p:sp>
+        <p:nvSpPr>
+          <p:cNvPr id="56" name="Text 53"/>
+          <p:cNvSpPr txBox="1"/>
+          <p:nvPr/>
+        </p:nvSpPr>
+        <p:spPr>
+          <a:xfrm>
+            <a:off x="11173968" y="3520440"/>
+            <a:ext cx="411480" cy="365760"/>
+          </a:xfrm>
+          <a:prstGeom prst="rect">
+            <a:avLst/>
+          </a:prstGeom>
+          <a:noFill/>
+          <a:ln/>
+        </p:spPr>
+        <p:txBody>
+          <a:bodyPr wrap="square" lIns="0" tIns="0" rIns="0" bIns="0" rtlCol="0" anchor="ctr"/>
+          <a:lstStyle/>
+          <a:p>
+            <a:pPr algn="ctr" indent="0" marL="0">
+              <a:buNone/>
+            </a:pPr>
+            <a:r>
+              <a:rPr lang="en-US" sz="1600" b="1" dirty="0">
+                <a:solidFill>
+                  <a:srgbClr val="FFFFFF"/>
+                </a:solidFill>
+                <a:latin typeface="Calibri" pitchFamily="34" charset="0"/>
+                <a:ea typeface="Calibri" pitchFamily="34" charset="-122"/>
+                <a:cs typeface="Calibri" pitchFamily="34" charset="-120"/>
+              </a:rPr>
+              <a:t>b</a:t>
+            </a:r>
+            <a:endParaRPr lang="en-US" sz="1600" dirty="0"/>
+          </a:p>
+        </p:txBody>
+      </p:sp>
+      <p:sp>
+        <p:nvSpPr>
+          <p:cNvPr id="57" name="Shape 54"/>
+          <p:cNvSpPr/>
+          <p:nvPr/>
+        </p:nvSpPr>
+        <p:spPr>
+          <a:xfrm>
+            <a:off x="8046720" y="4105656"/>
+            <a:ext cx="3611880" cy="621792"/>
+          </a:xfrm>
+          <a:prstGeom prst="roundRect">
+            <a:avLst>
+              <a:gd name="adj" fmla="val 7353"/>
+            </a:avLst>
+          </a:prstGeom>
+          <a:solidFill>
+            <a:srgbClr val="F4F7FD"/>
+          </a:solidFill>
+          <a:ln/>
+        </p:spPr>
+      </p:sp>
+      <p:sp>
+        <p:nvSpPr>
+          <p:cNvPr id="58" name="Text 55"/>
+          <p:cNvSpPr txBox="1"/>
+          <p:nvPr/>
+        </p:nvSpPr>
+        <p:spPr>
+          <a:xfrm>
+            <a:off x="8138160" y="4178808"/>
+            <a:ext cx="2971800" cy="502920"/>
+          </a:xfrm>
+          <a:prstGeom prst="rect">
+            <a:avLst/>
+          </a:prstGeom>
+          <a:noFill/>
+          <a:ln/>
+        </p:spPr>
+        <p:txBody>
+          <a:bodyPr wrap="square" lIns="0" tIns="0" rIns="0" bIns="0" rtlCol="0" anchor="ctr"/>
+          <a:lstStyle/>
+          <a:p>
+            <a:pPr indent="0" marL="0">
+              <a:buNone/>
+            </a:pPr>
+            <a:r>
+              <a:rPr lang="en-US" sz="1250" dirty="0">
+                <a:solidFill>
+                  <a:srgbClr val="1E2761"/>
+                </a:solidFill>
+                <a:latin typeface="Cambria" pitchFamily="34" charset="0"/>
+                <a:ea typeface="Cambria" pitchFamily="34" charset="-122"/>
+                <a:cs typeface="Cambria" pitchFamily="34" charset="-120"/>
+              </a:rPr>
+              <a:t>die ganze Halle fängt an zu schrein!</a:t>
+            </a:r>
+            <a:endParaRPr lang="en-US" sz="1250" dirty="0"/>
+          </a:p>
+        </p:txBody>
+      </p:sp>
+      <p:sp>
+        <p:nvSpPr>
+          <p:cNvPr id="59" name="Shape 56"/>
+          <p:cNvSpPr/>
+          <p:nvPr/>
+        </p:nvSpPr>
+        <p:spPr>
+          <a:xfrm>
+            <a:off x="11173968" y="4233672"/>
+            <a:ext cx="411480" cy="365760"/>
+          </a:xfrm>
+          <a:prstGeom prst="roundRect">
+            <a:avLst>
+              <a:gd name="adj" fmla="val 50000"/>
+            </a:avLst>
+          </a:prstGeom>
+          <a:solidFill>
+            <a:srgbClr val="C77C12"/>
+          </a:solidFill>
+          <a:ln/>
+        </p:spPr>
+      </p:sp>
+      <p:sp>
+        <p:nvSpPr>
+          <p:cNvPr id="60" name="Text 57"/>
+          <p:cNvSpPr txBox="1"/>
+          <p:nvPr/>
+        </p:nvSpPr>
+        <p:spPr>
+          <a:xfrm>
+            <a:off x="11173968" y="4233672"/>
+            <a:ext cx="411480" cy="365760"/>
+          </a:xfrm>
+          <a:prstGeom prst="rect">
+            <a:avLst/>
+          </a:prstGeom>
+          <a:noFill/>
+          <a:ln/>
+        </p:spPr>
+        <p:txBody>
+          <a:bodyPr wrap="square" lIns="0" tIns="0" rIns="0" bIns="0" rtlCol="0" anchor="ctr"/>
+          <a:lstStyle/>
+          <a:p>
+            <a:pPr algn="ctr" indent="0" marL="0">
+              <a:buNone/>
+            </a:pPr>
+            <a:r>
+              <a:rPr lang="en-US" sz="1600" b="1" dirty="0">
+                <a:solidFill>
+                  <a:srgbClr val="FFFFFF"/>
+                </a:solidFill>
+                <a:latin typeface="Calibri" pitchFamily="34" charset="0"/>
+                <a:ea typeface="Calibri" pitchFamily="34" charset="-122"/>
+                <a:cs typeface="Calibri" pitchFamily="34" charset="-120"/>
+              </a:rPr>
+              <a:t>b</a:t>
+            </a:r>
+            <a:endParaRPr lang="en-US" sz="1600" dirty="0"/>
+          </a:p>
+        </p:txBody>
+      </p:sp>
+      <p:sp>
+        <p:nvSpPr>
+          <p:cNvPr id="61" name="Shape 58"/>
+          <p:cNvSpPr/>
+          <p:nvPr/>
+        </p:nvSpPr>
+        <p:spPr>
+          <a:xfrm>
+            <a:off x="548640" y="4983480"/>
             <a:ext cx="11064240" cy="777240"/>
           </a:xfrm>
           <a:prstGeom prst="roundRect">
@@ -6124,13 +9629,13 @@
       </p:sp>
       <p:sp>
         <p:nvSpPr>
-          <p:cNvPr id="24" name="Text 21"/>
-          <p:cNvSpPr txBox="1"/>
-          <p:nvPr/>
-        </p:nvSpPr>
-        <p:spPr>
-          <a:xfrm>
-            <a:off x="822960" y="5230368"/>
+          <p:cNvPr id="62" name="Text 59"/>
+          <p:cNvSpPr txBox="1"/>
+          <p:nvPr/>
+        </p:nvSpPr>
+        <p:spPr>
+          <a:xfrm>
+            <a:off x="822960" y="5138928"/>
             <a:ext cx="10607040" cy="502920"/>
           </a:xfrm>
           <a:prstGeom prst="rect">
@@ -6170,6 +9675,20 @@
                 <a:cs typeface="Calibri" pitchFamily="34" charset="-120"/>
               </a:rPr>
               <a:t>Paarreim (aabb)</a:t>
+            </a:r>
+            <a:pPr indent="0" marL="0">
+              <a:buNone/>
+            </a:pPr>
+            <a:r>
+              <a:rPr lang="en-US" sz="2400" dirty="0">
+                <a:solidFill>
+                  <a:srgbClr val="1E2761"/>
+                </a:solidFill>
+                <a:latin typeface="Calibri" pitchFamily="34" charset="0"/>
+                <a:ea typeface="Calibri" pitchFamily="34" charset="-122"/>
+                <a:cs typeface="Calibri" pitchFamily="34" charset="-120"/>
+              </a:rPr>
+              <a:t>  – in allen drei Fassungen</a:t>
             </a:r>
             <a:endParaRPr lang="en-US" sz="2400" dirty="0"/>
           </a:p>
